--- a/presentation/SQL_Project_Shivani_Gundla.pptx
+++ b/presentation/SQL_Project_Shivani_Gundla.pptx
@@ -8,29 +8,29 @@
     <p:notesMasterId r:id="rId26"/>
   </p:notesMasterIdLst>
   <p:sldIdLst>
-    <p:sldId id="256" r:id="rId2"/>
-    <p:sldId id="257" r:id="rId3"/>
-    <p:sldId id="275" r:id="rId4"/>
-    <p:sldId id="274" r:id="rId5"/>
+    <p:sldId id="258" r:id="rId2"/>
+    <p:sldId id="256" r:id="rId3"/>
+    <p:sldId id="259" r:id="rId4"/>
+    <p:sldId id="275" r:id="rId5"/>
     <p:sldId id="260" r:id="rId6"/>
-    <p:sldId id="291" r:id="rId7"/>
-    <p:sldId id="261" r:id="rId8"/>
-    <p:sldId id="272" r:id="rId9"/>
-    <p:sldId id="273" r:id="rId10"/>
-    <p:sldId id="276" r:id="rId11"/>
-    <p:sldId id="287" r:id="rId12"/>
-    <p:sldId id="277" r:id="rId13"/>
-    <p:sldId id="279" r:id="rId14"/>
-    <p:sldId id="286" r:id="rId15"/>
-    <p:sldId id="278" r:id="rId16"/>
-    <p:sldId id="280" r:id="rId17"/>
-    <p:sldId id="285" r:id="rId18"/>
-    <p:sldId id="284" r:id="rId19"/>
-    <p:sldId id="294" r:id="rId20"/>
-    <p:sldId id="288" r:id="rId21"/>
-    <p:sldId id="281" r:id="rId22"/>
-    <p:sldId id="292" r:id="rId23"/>
-    <p:sldId id="259" r:id="rId24"/>
+    <p:sldId id="274" r:id="rId7"/>
+    <p:sldId id="291" r:id="rId8"/>
+    <p:sldId id="261" r:id="rId9"/>
+    <p:sldId id="272" r:id="rId10"/>
+    <p:sldId id="273" r:id="rId11"/>
+    <p:sldId id="276" r:id="rId12"/>
+    <p:sldId id="287" r:id="rId13"/>
+    <p:sldId id="277" r:id="rId14"/>
+    <p:sldId id="279" r:id="rId15"/>
+    <p:sldId id="286" r:id="rId16"/>
+    <p:sldId id="278" r:id="rId17"/>
+    <p:sldId id="280" r:id="rId18"/>
+    <p:sldId id="285" r:id="rId19"/>
+    <p:sldId id="284" r:id="rId20"/>
+    <p:sldId id="294" r:id="rId21"/>
+    <p:sldId id="288" r:id="rId22"/>
+    <p:sldId id="281" r:id="rId23"/>
+    <p:sldId id="292" r:id="rId24"/>
     <p:sldId id="293" r:id="rId25"/>
   </p:sldIdLst>
   <p:sldSz cx="12192000" cy="6858000"/>
@@ -1738,6 +1738,123 @@
 </file>
 
 <file path=ppt/notesSlides/notesSlide1.xml><?xml version="1.0" encoding="utf-8"?>
+<p:notes xmlns:a="http://schemas.openxmlformats.org/drawingml/2006/main" xmlns:r="http://schemas.openxmlformats.org/officeDocument/2006/relationships" xmlns:p="http://schemas.openxmlformats.org/presentationml/2006/main">
+  <p:cSld>
+    <p:spTree>
+      <p:nvGrpSpPr>
+        <p:cNvPr id="1" name=""/>
+        <p:cNvGrpSpPr/>
+        <p:nvPr/>
+      </p:nvGrpSpPr>
+      <p:grpSpPr>
+        <a:xfrm>
+          <a:off x="0" y="0"/>
+          <a:ext cx="0" cy="0"/>
+          <a:chOff x="0" y="0"/>
+          <a:chExt cx="0" cy="0"/>
+        </a:xfrm>
+      </p:grpSpPr>
+      <p:sp>
+        <p:nvSpPr>
+          <p:cNvPr id="2" name="Slide Image Placeholder 1"/>
+          <p:cNvSpPr>
+            <a:spLocks noGrp="1" noRot="1" noChangeAspect="1"/>
+          </p:cNvSpPr>
+          <p:nvPr>
+            <p:ph type="sldImg"/>
+          </p:nvPr>
+        </p:nvSpPr>
+        <p:spPr/>
+      </p:sp>
+      <p:sp>
+        <p:nvSpPr>
+          <p:cNvPr id="3" name="Notes Placeholder 2"/>
+          <p:cNvSpPr>
+            <a:spLocks noGrp="1"/>
+          </p:cNvSpPr>
+          <p:nvPr>
+            <p:ph type="body" idx="1"/>
+          </p:nvPr>
+        </p:nvSpPr>
+        <p:spPr/>
+        <p:txBody>
+          <a:bodyPr/>
+          <a:lstStyle/>
+          <a:p>
+            <a:endParaRPr lang="en-GB" dirty="0"/>
+          </a:p>
+        </p:txBody>
+      </p:sp>
+      <p:sp>
+        <p:nvSpPr>
+          <p:cNvPr id="4" name="Slide Number Placeholder 3"/>
+          <p:cNvSpPr>
+            <a:spLocks noGrp="1"/>
+          </p:cNvSpPr>
+          <p:nvPr>
+            <p:ph type="sldNum" idx="12"/>
+          </p:nvPr>
+        </p:nvSpPr>
+        <p:spPr/>
+        <p:txBody>
+          <a:bodyPr/>
+          <a:lstStyle/>
+          <a:p>
+            <a:pPr marL="0" marR="0" lvl="0" indent="0" algn="r" rtl="0">
+              <a:lnSpc>
+                <a:spcPct val="100000"/>
+              </a:lnSpc>
+              <a:spcBef>
+                <a:spcPts val="0"/>
+              </a:spcBef>
+              <a:spcAft>
+                <a:spcPts val="0"/>
+              </a:spcAft>
+              <a:buClr>
+                <a:srgbClr val="000000"/>
+              </a:buClr>
+              <a:buSzPts val="1200"/>
+              <a:buFont typeface="Arial"/>
+              <a:buNone/>
+            </a:pPr>
+            <a:fld id="{00000000-1234-1234-1234-123412341234}" type="slidenum">
+              <a:rPr lang="en-IN" sz="1200" b="0" i="0" u="none" strike="noStrike" cap="none" smtClean="0">
+                <a:solidFill>
+                  <a:schemeClr val="dk1"/>
+                </a:solidFill>
+                <a:latin typeface="Calibri"/>
+                <a:ea typeface="Calibri"/>
+                <a:cs typeface="Calibri"/>
+                <a:sym typeface="Calibri"/>
+              </a:rPr>
+              <a:t>1</a:t>
+            </a:fld>
+            <a:endParaRPr lang="en-IN" sz="1200" b="0" i="0" u="none" strike="noStrike" cap="none">
+              <a:solidFill>
+                <a:schemeClr val="dk1"/>
+              </a:solidFill>
+              <a:latin typeface="Calibri"/>
+              <a:ea typeface="Calibri"/>
+              <a:cs typeface="Calibri"/>
+              <a:sym typeface="Calibri"/>
+            </a:endParaRPr>
+          </a:p>
+        </p:txBody>
+      </p:sp>
+    </p:spTree>
+    <p:extLst>
+      <p:ext uri="{BB962C8B-B14F-4D97-AF65-F5344CB8AC3E}">
+        <p14:creationId xmlns:p14="http://schemas.microsoft.com/office/powerpoint/2010/main" val="322348726"/>
+      </p:ext>
+    </p:extLst>
+  </p:cSld>
+  <p:clrMapOvr>
+    <a:masterClrMapping/>
+  </p:clrMapOvr>
+</p:notes>
+</file>
+
+<file path=ppt/notesSlides/notesSlide2.xml><?xml version="1.0" encoding="utf-8"?>
 <p:notes xmlns:a="http://schemas.openxmlformats.org/drawingml/2006/main" xmlns:r="http://schemas.openxmlformats.org/officeDocument/2006/relationships" xmlns:p="http://schemas.openxmlformats.org/presentationml/2006/main" showMasterSp="0" showMasterPhAnim="0">
   <p:cSld>
     <p:spTree>
@@ -1863,255 +1980,7 @@
 </p:notes>
 </file>
 
-<file path=ppt/notesSlides/notesSlide2.xml><?xml version="1.0" encoding="utf-8"?>
-<p:notes xmlns:a="http://schemas.openxmlformats.org/drawingml/2006/main" xmlns:r="http://schemas.openxmlformats.org/officeDocument/2006/relationships" xmlns:p="http://schemas.openxmlformats.org/presentationml/2006/main" showMasterSp="0" showMasterPhAnim="0">
-  <p:cSld>
-    <p:spTree>
-      <p:nvGrpSpPr>
-        <p:cNvPr id="1" name="Shape 100"/>
-        <p:cNvGrpSpPr/>
-        <p:nvPr/>
-      </p:nvGrpSpPr>
-      <p:grpSpPr>
-        <a:xfrm>
-          <a:off x="0" y="0"/>
-          <a:ext cx="0" cy="0"/>
-          <a:chOff x="0" y="0"/>
-          <a:chExt cx="0" cy="0"/>
-        </a:xfrm>
-      </p:grpSpPr>
-      <p:sp>
-        <p:nvSpPr>
-          <p:cNvPr id="101" name="Google Shape;101;p3:notes"/>
-          <p:cNvSpPr txBox="1">
-            <a:spLocks noGrp="1"/>
-          </p:cNvSpPr>
-          <p:nvPr>
-            <p:ph type="body" idx="1"/>
-          </p:nvPr>
-        </p:nvSpPr>
-        <p:spPr>
-          <a:xfrm>
-            <a:off x="685800" y="4400550"/>
-            <a:ext cx="5486400" cy="3600450"/>
-          </a:xfrm>
-          <a:prstGeom prst="rect">
-            <a:avLst/>
-          </a:prstGeom>
-          <a:noFill/>
-          <a:ln>
-            <a:noFill/>
-          </a:ln>
-        </p:spPr>
-        <p:txBody>
-          <a:bodyPr spcFirstLastPara="1" wrap="square" lIns="91425" tIns="45700" rIns="91425" bIns="45700" anchor="t" anchorCtr="0">
-            <a:noAutofit/>
-          </a:bodyPr>
-          <a:lstStyle/>
-          <a:p>
-            <a:pPr marL="0" lvl="0" indent="0" algn="l" rtl="0">
-              <a:lnSpc>
-                <a:spcPct val="100000"/>
-              </a:lnSpc>
-              <a:spcBef>
-                <a:spcPts val="0"/>
-              </a:spcBef>
-              <a:spcAft>
-                <a:spcPts val="0"/>
-              </a:spcAft>
-              <a:buSzPts val="1400"/>
-              <a:buNone/>
-            </a:pPr>
-            <a:endParaRPr/>
-          </a:p>
-        </p:txBody>
-      </p:sp>
-      <p:sp>
-        <p:nvSpPr>
-          <p:cNvPr id="102" name="Google Shape;102;p3:notes"/>
-          <p:cNvSpPr>
-            <a:spLocks noGrp="1" noRot="1" noChangeAspect="1"/>
-          </p:cNvSpPr>
-          <p:nvPr>
-            <p:ph type="sldImg" idx="2"/>
-          </p:nvPr>
-        </p:nvSpPr>
-        <p:spPr>
-          <a:xfrm>
-            <a:off x="685800" y="1143000"/>
-            <a:ext cx="5486400" cy="3086100"/>
-          </a:xfrm>
-          <a:custGeom>
-            <a:avLst/>
-            <a:gdLst/>
-            <a:ahLst/>
-            <a:cxnLst/>
-            <a:rect l="l" t="t" r="r" b="b"/>
-            <a:pathLst>
-              <a:path w="120000" h="120000" extrusionOk="0">
-                <a:moveTo>
-                  <a:pt x="0" y="0"/>
-                </a:moveTo>
-                <a:lnTo>
-                  <a:pt x="120000" y="0"/>
-                </a:lnTo>
-                <a:lnTo>
-                  <a:pt x="120000" y="120000"/>
-                </a:lnTo>
-                <a:lnTo>
-                  <a:pt x="0" y="120000"/>
-                </a:lnTo>
-                <a:close/>
-              </a:path>
-            </a:pathLst>
-          </a:custGeom>
-          <a:noFill/>
-          <a:ln w="12700" cap="flat" cmpd="sng">
-            <a:solidFill>
-              <a:srgbClr val="000000"/>
-            </a:solidFill>
-            <a:prstDash val="solid"/>
-            <a:round/>
-            <a:headEnd type="none" w="sm" len="sm"/>
-            <a:tailEnd type="none" w="sm" len="sm"/>
-          </a:ln>
-        </p:spPr>
-      </p:sp>
-    </p:spTree>
-  </p:cSld>
-  <p:clrMapOvr>
-    <a:masterClrMapping/>
-  </p:clrMapOvr>
-</p:notes>
-</file>
-
 <file path=ppt/notesSlides/notesSlide3.xml><?xml version="1.0" encoding="utf-8"?>
-<p:notes xmlns:a="http://schemas.openxmlformats.org/drawingml/2006/main" xmlns:r="http://schemas.openxmlformats.org/officeDocument/2006/relationships" xmlns:p="http://schemas.openxmlformats.org/presentationml/2006/main" showMasterSp="0" showMasterPhAnim="0">
-  <p:cSld>
-    <p:spTree>
-      <p:nvGrpSpPr>
-        <p:cNvPr id="1" name="Shape 112"/>
-        <p:cNvGrpSpPr/>
-        <p:nvPr/>
-      </p:nvGrpSpPr>
-      <p:grpSpPr>
-        <a:xfrm>
-          <a:off x="0" y="0"/>
-          <a:ext cx="0" cy="0"/>
-          <a:chOff x="0" y="0"/>
-          <a:chExt cx="0" cy="0"/>
-        </a:xfrm>
-      </p:grpSpPr>
-      <p:sp>
-        <p:nvSpPr>
-          <p:cNvPr id="113" name="Google Shape;113;p5:notes"/>
-          <p:cNvSpPr txBox="1">
-            <a:spLocks noGrp="1"/>
-          </p:cNvSpPr>
-          <p:nvPr>
-            <p:ph type="body" idx="1"/>
-          </p:nvPr>
-        </p:nvSpPr>
-        <p:spPr>
-          <a:xfrm>
-            <a:off x="685800" y="4400550"/>
-            <a:ext cx="5486400" cy="3600450"/>
-          </a:xfrm>
-          <a:prstGeom prst="rect">
-            <a:avLst/>
-          </a:prstGeom>
-          <a:noFill/>
-          <a:ln>
-            <a:noFill/>
-          </a:ln>
-        </p:spPr>
-        <p:txBody>
-          <a:bodyPr spcFirstLastPara="1" wrap="square" lIns="91425" tIns="45700" rIns="91425" bIns="45700" anchor="t" anchorCtr="0">
-            <a:noAutofit/>
-          </a:bodyPr>
-          <a:lstStyle/>
-          <a:p>
-            <a:pPr marL="0" lvl="0" indent="0" algn="l" rtl="0">
-              <a:lnSpc>
-                <a:spcPct val="100000"/>
-              </a:lnSpc>
-              <a:spcBef>
-                <a:spcPts val="0"/>
-              </a:spcBef>
-              <a:spcAft>
-                <a:spcPts val="0"/>
-              </a:spcAft>
-              <a:buClr>
-                <a:schemeClr val="dk1"/>
-              </a:buClr>
-              <a:buSzPts val="1200"/>
-              <a:buFont typeface="Calibri"/>
-              <a:buNone/>
-            </a:pPr>
-            <a:endParaRPr/>
-          </a:p>
-        </p:txBody>
-      </p:sp>
-      <p:sp>
-        <p:nvSpPr>
-          <p:cNvPr id="114" name="Google Shape;114;p5:notes"/>
-          <p:cNvSpPr>
-            <a:spLocks noGrp="1" noRot="1" noChangeAspect="1"/>
-          </p:cNvSpPr>
-          <p:nvPr>
-            <p:ph type="sldImg" idx="2"/>
-          </p:nvPr>
-        </p:nvSpPr>
-        <p:spPr>
-          <a:xfrm>
-            <a:off x="685800" y="1143000"/>
-            <a:ext cx="5486400" cy="3086100"/>
-          </a:xfrm>
-          <a:custGeom>
-            <a:avLst/>
-            <a:gdLst/>
-            <a:ahLst/>
-            <a:cxnLst/>
-            <a:rect l="l" t="t" r="r" b="b"/>
-            <a:pathLst>
-              <a:path w="120000" h="120000" extrusionOk="0">
-                <a:moveTo>
-                  <a:pt x="0" y="0"/>
-                </a:moveTo>
-                <a:lnTo>
-                  <a:pt x="120000" y="0"/>
-                </a:lnTo>
-                <a:lnTo>
-                  <a:pt x="120000" y="120000"/>
-                </a:lnTo>
-                <a:lnTo>
-                  <a:pt x="0" y="120000"/>
-                </a:lnTo>
-                <a:close/>
-              </a:path>
-            </a:pathLst>
-          </a:custGeom>
-          <a:noFill/>
-          <a:ln w="12700" cap="flat" cmpd="sng">
-            <a:solidFill>
-              <a:srgbClr val="000000"/>
-            </a:solidFill>
-            <a:prstDash val="solid"/>
-            <a:round/>
-            <a:headEnd type="none" w="sm" len="sm"/>
-            <a:tailEnd type="none" w="sm" len="sm"/>
-          </a:ln>
-        </p:spPr>
-      </p:sp>
-    </p:spTree>
-  </p:cSld>
-  <p:clrMapOvr>
-    <a:masterClrMapping/>
-  </p:clrMapOvr>
-</p:notes>
-</file>
-
-<file path=ppt/notesSlides/notesSlide4.xml><?xml version="1.0" encoding="utf-8"?>
 <p:notes xmlns:a="http://schemas.openxmlformats.org/drawingml/2006/main" xmlns:r="http://schemas.openxmlformats.org/officeDocument/2006/relationships" xmlns:p="http://schemas.openxmlformats.org/presentationml/2006/main" showMasterSp="0" showMasterPhAnim="0">
   <p:cSld>
     <p:spTree>
@@ -14814,9 +14683,20 @@
 <file path=ppt/slides/slide1.xml><?xml version="1.0" encoding="utf-8"?>
 <p:sld xmlns:a="http://schemas.openxmlformats.org/drawingml/2006/main" xmlns:r="http://schemas.openxmlformats.org/officeDocument/2006/relationships" xmlns:p="http://schemas.openxmlformats.org/presentationml/2006/main">
   <p:cSld>
+    <p:bg>
+      <p:bgPr>
+        <a:solidFill>
+          <a:schemeClr val="tx1">
+            <a:lumMod val="95000"/>
+            <a:lumOff val="5000"/>
+          </a:schemeClr>
+        </a:solidFill>
+        <a:effectLst/>
+      </p:bgPr>
+    </p:bg>
     <p:spTree>
       <p:nvGrpSpPr>
-        <p:cNvPr id="1" name="Shape 97"/>
+        <p:cNvPr id="1" name=""/>
         <p:cNvGrpSpPr/>
         <p:nvPr/>
       </p:nvGrpSpPr>
@@ -14828,85 +14708,12 @@
           <a:chExt cx="0" cy="0"/>
         </a:xfrm>
       </p:grpSpPr>
-      <p:pic>
-        <p:nvPicPr>
-          <p:cNvPr id="98" name="Google Shape;98;p1"/>
-          <p:cNvPicPr preferRelativeResize="0"/>
-          <p:nvPr/>
-        </p:nvPicPr>
-        <p:blipFill rotWithShape="1">
-          <a:blip r:embed="rId3">
-            <a:alphaModFix/>
-          </a:blip>
-          <a:srcRect/>
-          <a:stretch/>
-        </p:blipFill>
-        <p:spPr>
-          <a:xfrm>
-            <a:off x="0" y="81951"/>
-            <a:ext cx="12190815" cy="6694098"/>
-          </a:xfrm>
-          <a:prstGeom prst="rect">
-            <a:avLst/>
-          </a:prstGeom>
-          <a:noFill/>
-          <a:ln>
-            <a:noFill/>
-          </a:ln>
-        </p:spPr>
-      </p:pic>
-      <p:sp>
-        <p:nvSpPr>
-          <p:cNvPr id="99" name="Google Shape;99;p1"/>
-          <p:cNvSpPr txBox="1"/>
-          <p:nvPr/>
-        </p:nvSpPr>
-        <p:spPr>
-          <a:xfrm>
-            <a:off x="2198584" y="3881888"/>
-            <a:ext cx="7246189" cy="1200288"/>
-          </a:xfrm>
-          <a:prstGeom prst="rect">
-            <a:avLst/>
-          </a:prstGeom>
-          <a:noFill/>
-          <a:ln>
-            <a:noFill/>
-          </a:ln>
-        </p:spPr>
-        <p:txBody>
-          <a:bodyPr spcFirstLastPara="1" wrap="square" lIns="91425" tIns="45700" rIns="91425" bIns="45700" anchor="t" anchorCtr="0">
-            <a:spAutoFit/>
-          </a:bodyPr>
-          <a:lstStyle/>
-          <a:p>
-            <a:pPr lvl="0" algn="ctr">
-              <a:buSzPts val="1800"/>
-            </a:pPr>
-            <a:r>
-              <a:rPr lang="en-GB" sz="3600" b="1" dirty="0">
-                <a:latin typeface="Times New Roman" panose="02020603050405020304" pitchFamily="18" charset="0"/>
-                <a:cs typeface="Times New Roman" panose="02020603050405020304" pitchFamily="18" charset="0"/>
-              </a:rPr>
-              <a:t>World Wide Energy Consumption Analysis Using MySQL</a:t>
-            </a:r>
-            <a:endParaRPr sz="3600" b="0" i="0" strike="noStrike" cap="none" dirty="0">
-              <a:solidFill>
-                <a:srgbClr val="000000"/>
-              </a:solidFill>
-              <a:latin typeface="Times New Roman" panose="02020603050405020304" pitchFamily="18" charset="0"/>
-              <a:cs typeface="Times New Roman" panose="02020603050405020304" pitchFamily="18" charset="0"/>
-              <a:sym typeface="Arial"/>
-            </a:endParaRPr>
-          </a:p>
-        </p:txBody>
-      </p:sp>
       <p:sp>
         <p:nvSpPr>
           <p:cNvPr id="2" name="TextBox 1">
             <a:extLst>
               <a:ext uri="{FF2B5EF4-FFF2-40B4-BE49-F238E27FC236}">
-                <a16:creationId xmlns:a16="http://schemas.microsoft.com/office/drawing/2014/main" id="{52D775B4-4629-C68F-7C65-947ED7265480}"/>
+                <a16:creationId xmlns:a16="http://schemas.microsoft.com/office/drawing/2014/main" id="{98FF2BB0-6C85-43EA-0720-B362A6BB0351}"/>
               </a:ext>
             </a:extLst>
           </p:cNvPr>
@@ -14915,8 +14722,8 @@
         </p:nvSpPr>
         <p:spPr>
           <a:xfrm>
-            <a:off x="4169664" y="5248656"/>
-            <a:ext cx="3200400" cy="461665"/>
+            <a:off x="71438" y="42863"/>
+            <a:ext cx="6886575" cy="1569660"/>
           </a:xfrm>
           <a:prstGeom prst="rect">
             <a:avLst/>
@@ -14929,22 +14736,576 @@
           </a:bodyPr>
           <a:lstStyle/>
           <a:p>
-            <a:pPr algn="ctr"/>
             <a:r>
-              <a:rPr lang="en-IN" sz="2400" b="1" dirty="0">
+              <a:rPr lang="en-US" sz="3200" b="1" dirty="0">
+                <a:solidFill>
+                  <a:schemeClr val="bg1"/>
+                </a:solidFill>
                 <a:latin typeface="Times New Roman" panose="02020603050405020304" pitchFamily="18" charset="0"/>
                 <a:cs typeface="Times New Roman" panose="02020603050405020304" pitchFamily="18" charset="0"/>
               </a:rPr>
-              <a:t>Shivani Gundla</a:t>
+              <a:t>World Wide Energy Consumption Analysis Using MySQL</a:t>
             </a:r>
-            <a:endParaRPr lang="en-GB" sz="2400" b="1" dirty="0">
+            <a:endParaRPr lang="en-US" sz="3200" dirty="0">
+              <a:solidFill>
+                <a:schemeClr val="bg1"/>
+              </a:solidFill>
+              <a:latin typeface="Times New Roman" panose="02020603050405020304" pitchFamily="18" charset="0"/>
+              <a:cs typeface="Times New Roman" panose="02020603050405020304" pitchFamily="18" charset="0"/>
+            </a:endParaRPr>
+          </a:p>
+          <a:p>
+            <a:endParaRPr lang="en-GB" sz="3200" b="1" dirty="0">
+              <a:solidFill>
+                <a:schemeClr val="bg1"/>
+              </a:solidFill>
               <a:latin typeface="Times New Roman" panose="02020603050405020304" pitchFamily="18" charset="0"/>
               <a:cs typeface="Times New Roman" panose="02020603050405020304" pitchFamily="18" charset="0"/>
             </a:endParaRPr>
           </a:p>
         </p:txBody>
       </p:sp>
+      <p:sp>
+        <p:nvSpPr>
+          <p:cNvPr id="4" name="Parallelogram 3">
+            <a:extLst>
+              <a:ext uri="{FF2B5EF4-FFF2-40B4-BE49-F238E27FC236}">
+                <a16:creationId xmlns:a16="http://schemas.microsoft.com/office/drawing/2014/main" id="{FEB42C46-B1FF-B2BE-5D42-6C15B4B0A402}"/>
+              </a:ext>
+            </a:extLst>
+          </p:cNvPr>
+          <p:cNvSpPr/>
+          <p:nvPr/>
+        </p:nvSpPr>
+        <p:spPr>
+          <a:xfrm>
+            <a:off x="8133597" y="6782"/>
+            <a:ext cx="4210095" cy="759591"/>
+          </a:xfrm>
+          <a:prstGeom prst="parallelogram">
+            <a:avLst/>
+          </a:prstGeom>
+          <a:solidFill>
+            <a:schemeClr val="bg1"/>
+          </a:solidFill>
+        </p:spPr>
+        <p:style>
+          <a:lnRef idx="2">
+            <a:schemeClr val="accent1">
+              <a:shade val="15000"/>
+            </a:schemeClr>
+          </a:lnRef>
+          <a:fillRef idx="1">
+            <a:schemeClr val="accent1"/>
+          </a:fillRef>
+          <a:effectRef idx="0">
+            <a:schemeClr val="accent1"/>
+          </a:effectRef>
+          <a:fontRef idx="minor">
+            <a:schemeClr val="lt1"/>
+          </a:fontRef>
+        </p:style>
+        <p:txBody>
+          <a:bodyPr rtlCol="0" anchor="ctr"/>
+          <a:lstStyle/>
+          <a:p>
+            <a:pPr algn="ctr"/>
+            <a:r>
+              <a:rPr lang="en-IN" sz="3600" b="1" dirty="0">
+                <a:solidFill>
+                  <a:schemeClr val="tx1"/>
+                </a:solidFill>
+                <a:latin typeface="Times New Roman" panose="02020603050405020304" pitchFamily="18" charset="0"/>
+                <a:cs typeface="Times New Roman" panose="02020603050405020304" pitchFamily="18" charset="0"/>
+              </a:rPr>
+              <a:t>      SQL Project</a:t>
+            </a:r>
+            <a:endParaRPr lang="en-GB" sz="3600" b="1" dirty="0">
+              <a:solidFill>
+                <a:schemeClr val="tx1"/>
+              </a:solidFill>
+              <a:latin typeface="Times New Roman" panose="02020603050405020304" pitchFamily="18" charset="0"/>
+              <a:cs typeface="Times New Roman" panose="02020603050405020304" pitchFamily="18" charset="0"/>
+            </a:endParaRPr>
+          </a:p>
+        </p:txBody>
+      </p:sp>
+      <p:sp>
+        <p:nvSpPr>
+          <p:cNvPr id="8" name="Parallelogram 7">
+            <a:extLst>
+              <a:ext uri="{FF2B5EF4-FFF2-40B4-BE49-F238E27FC236}">
+                <a16:creationId xmlns:a16="http://schemas.microsoft.com/office/drawing/2014/main" id="{8DC88348-81CD-5D88-4C98-63B73290B550}"/>
+              </a:ext>
+            </a:extLst>
+          </p:cNvPr>
+          <p:cNvSpPr/>
+          <p:nvPr/>
+        </p:nvSpPr>
+        <p:spPr>
+          <a:xfrm>
+            <a:off x="-188834" y="5984140"/>
+            <a:ext cx="3019446" cy="879836"/>
+          </a:xfrm>
+          <a:prstGeom prst="parallelogram">
+            <a:avLst/>
+          </a:prstGeom>
+          <a:solidFill>
+            <a:schemeClr val="bg1"/>
+          </a:solidFill>
+          <a:effectLst>
+            <a:glow rad="101600">
+              <a:schemeClr val="tx1">
+                <a:lumMod val="85000"/>
+                <a:lumOff val="15000"/>
+                <a:alpha val="60000"/>
+              </a:schemeClr>
+            </a:glow>
+          </a:effectLst>
+        </p:spPr>
+        <p:style>
+          <a:lnRef idx="2">
+            <a:schemeClr val="dk1">
+              <a:shade val="15000"/>
+            </a:schemeClr>
+          </a:lnRef>
+          <a:fillRef idx="1">
+            <a:schemeClr val="dk1"/>
+          </a:fillRef>
+          <a:effectRef idx="0">
+            <a:schemeClr val="dk1"/>
+          </a:effectRef>
+          <a:fontRef idx="minor">
+            <a:schemeClr val="lt1"/>
+          </a:fontRef>
+        </p:style>
+        <p:txBody>
+          <a:bodyPr rtlCol="0" anchor="ctr"/>
+          <a:lstStyle/>
+          <a:p>
+            <a:pPr algn="ctr"/>
+            <a:r>
+              <a:rPr lang="en-IN" sz="1600" dirty="0">
+                <a:solidFill>
+                  <a:schemeClr val="tx1"/>
+                </a:solidFill>
+              </a:rPr>
+              <a:t>        Shivani Gundla</a:t>
+            </a:r>
+            <a:endParaRPr lang="en-GB" sz="1600" dirty="0">
+              <a:solidFill>
+                <a:schemeClr val="tx1"/>
+              </a:solidFill>
+            </a:endParaRPr>
+          </a:p>
+        </p:txBody>
+      </p:sp>
+      <p:sp>
+        <p:nvSpPr>
+          <p:cNvPr id="12" name="Parallelogram 11">
+            <a:extLst>
+              <a:ext uri="{FF2B5EF4-FFF2-40B4-BE49-F238E27FC236}">
+                <a16:creationId xmlns:a16="http://schemas.microsoft.com/office/drawing/2014/main" id="{C42313CB-4D23-C058-B565-7BBBFFDEC043}"/>
+              </a:ext>
+            </a:extLst>
+          </p:cNvPr>
+          <p:cNvSpPr/>
+          <p:nvPr/>
+        </p:nvSpPr>
+        <p:spPr>
+          <a:xfrm>
+            <a:off x="7915275" y="5984141"/>
+            <a:ext cx="4526060" cy="867616"/>
+          </a:xfrm>
+          <a:prstGeom prst="parallelogram">
+            <a:avLst/>
+          </a:prstGeom>
+          <a:solidFill>
+            <a:schemeClr val="bg1"/>
+          </a:solidFill>
+          <a:effectLst>
+            <a:glow rad="101600">
+              <a:schemeClr val="tx1">
+                <a:lumMod val="85000"/>
+                <a:lumOff val="15000"/>
+                <a:alpha val="60000"/>
+              </a:schemeClr>
+            </a:glow>
+          </a:effectLst>
+        </p:spPr>
+        <p:style>
+          <a:lnRef idx="2">
+            <a:schemeClr val="dk1">
+              <a:shade val="15000"/>
+            </a:schemeClr>
+          </a:lnRef>
+          <a:fillRef idx="1">
+            <a:schemeClr val="dk1"/>
+          </a:fillRef>
+          <a:effectRef idx="0">
+            <a:schemeClr val="dk1"/>
+          </a:effectRef>
+          <a:fontRef idx="minor">
+            <a:schemeClr val="lt1"/>
+          </a:fontRef>
+        </p:style>
+        <p:txBody>
+          <a:bodyPr rtlCol="0" anchor="ctr"/>
+          <a:lstStyle/>
+          <a:p>
+            <a:pPr algn="ctr"/>
+            <a:r>
+              <a:rPr lang="en-GB" sz="1600" dirty="0">
+                <a:solidFill>
+                  <a:schemeClr val="tx1"/>
+                </a:solidFill>
+                <a:hlinkClick r:id="rId3">
+                  <a:extLst>
+                    <a:ext uri="{A12FA001-AC4F-418D-AE19-62706E023703}">
+                      <ahyp:hlinkClr xmlns:ahyp="http://schemas.microsoft.com/office/drawing/2018/hyperlinkcolor" val="tx"/>
+                    </a:ext>
+                  </a:extLst>
+                </a:hlinkClick>
+              </a:rPr>
+              <a:t>https://github.com/ShivaniGundla</a:t>
+            </a:r>
+            <a:endParaRPr lang="en-GB" sz="1600" dirty="0">
+              <a:solidFill>
+                <a:schemeClr val="tx1"/>
+              </a:solidFill>
+            </a:endParaRPr>
+          </a:p>
+        </p:txBody>
+      </p:sp>
+      <p:pic>
+        <p:nvPicPr>
+          <p:cNvPr id="18" name="Picture 17">
+            <a:extLst>
+              <a:ext uri="{FF2B5EF4-FFF2-40B4-BE49-F238E27FC236}">
+                <a16:creationId xmlns:a16="http://schemas.microsoft.com/office/drawing/2014/main" id="{CB0C84F4-CACC-6D98-AAFB-507012A697D4}"/>
+              </a:ext>
+            </a:extLst>
+          </p:cNvPr>
+          <p:cNvPicPr>
+            <a:picLocks noChangeAspect="1"/>
+          </p:cNvPicPr>
+          <p:nvPr/>
+        </p:nvPicPr>
+        <p:blipFill>
+          <a:blip r:embed="rId4"/>
+          <a:stretch>
+            <a:fillRect/>
+          </a:stretch>
+        </p:blipFill>
+        <p:spPr>
+          <a:xfrm>
+            <a:off x="8133598" y="6306414"/>
+            <a:ext cx="304154" cy="304154"/>
+          </a:xfrm>
+          <a:prstGeom prst="rect">
+            <a:avLst/>
+          </a:prstGeom>
+        </p:spPr>
+      </p:pic>
+      <p:pic>
+        <p:nvPicPr>
+          <p:cNvPr id="20" name="Picture 19">
+            <a:extLst>
+              <a:ext uri="{FF2B5EF4-FFF2-40B4-BE49-F238E27FC236}">
+                <a16:creationId xmlns:a16="http://schemas.microsoft.com/office/drawing/2014/main" id="{27DB5458-42A2-B9DC-09C1-F76EC14C354D}"/>
+              </a:ext>
+            </a:extLst>
+          </p:cNvPr>
+          <p:cNvPicPr>
+            <a:picLocks noChangeAspect="1"/>
+          </p:cNvPicPr>
+          <p:nvPr/>
+        </p:nvPicPr>
+        <p:blipFill>
+          <a:blip r:embed="rId5"/>
+          <a:srcRect l="51706"/>
+          <a:stretch>
+            <a:fillRect/>
+          </a:stretch>
+        </p:blipFill>
+        <p:spPr>
+          <a:xfrm>
+            <a:off x="185736" y="6131094"/>
+            <a:ext cx="438316" cy="453800"/>
+          </a:xfrm>
+          <a:prstGeom prst="rect">
+            <a:avLst/>
+          </a:prstGeom>
+        </p:spPr>
+      </p:pic>
+      <p:sp>
+        <p:nvSpPr>
+          <p:cNvPr id="24" name="Parallelogram 23">
+            <a:extLst>
+              <a:ext uri="{FF2B5EF4-FFF2-40B4-BE49-F238E27FC236}">
+                <a16:creationId xmlns:a16="http://schemas.microsoft.com/office/drawing/2014/main" id="{B58C5E84-A749-8ADB-8213-AE6F24A87F1F}"/>
+              </a:ext>
+            </a:extLst>
+          </p:cNvPr>
+          <p:cNvSpPr/>
+          <p:nvPr/>
+        </p:nvSpPr>
+        <p:spPr>
+          <a:xfrm>
+            <a:off x="2704723" y="5983602"/>
+            <a:ext cx="5319713" cy="867616"/>
+          </a:xfrm>
+          <a:prstGeom prst="parallelogram">
+            <a:avLst/>
+          </a:prstGeom>
+          <a:solidFill>
+            <a:schemeClr val="bg1"/>
+          </a:solidFill>
+          <a:effectLst>
+            <a:glow rad="101600">
+              <a:schemeClr val="tx1">
+                <a:lumMod val="85000"/>
+                <a:lumOff val="15000"/>
+                <a:alpha val="60000"/>
+              </a:schemeClr>
+            </a:glow>
+          </a:effectLst>
+        </p:spPr>
+        <p:style>
+          <a:lnRef idx="2">
+            <a:schemeClr val="dk1">
+              <a:shade val="15000"/>
+            </a:schemeClr>
+          </a:lnRef>
+          <a:fillRef idx="1">
+            <a:schemeClr val="dk1"/>
+          </a:fillRef>
+          <a:effectRef idx="0">
+            <a:schemeClr val="dk1"/>
+          </a:effectRef>
+          <a:fontRef idx="minor">
+            <a:schemeClr val="lt1"/>
+          </a:fontRef>
+        </p:style>
+        <p:txBody>
+          <a:bodyPr rtlCol="0" anchor="ctr"/>
+          <a:lstStyle/>
+          <a:p>
+            <a:pPr algn="ctr"/>
+            <a:r>
+              <a:rPr lang="en-GB" sz="1600" dirty="0">
+                <a:solidFill>
+                  <a:schemeClr val="tx1"/>
+                </a:solidFill>
+                <a:hlinkClick r:id="rId6">
+                  <a:extLst>
+                    <a:ext uri="{A12FA001-AC4F-418D-AE19-62706E023703}">
+                      <ahyp:hlinkClr xmlns:ahyp="http://schemas.microsoft.com/office/drawing/2018/hyperlinkcolor" val="tx"/>
+                    </a:ext>
+                  </a:extLst>
+                </a:hlinkClick>
+              </a:rPr>
+              <a:t>https://www.linkedin.com/in/shivanigundla29/</a:t>
+            </a:r>
+            <a:endParaRPr lang="en-GB" sz="1600" dirty="0">
+              <a:solidFill>
+                <a:schemeClr val="tx1"/>
+              </a:solidFill>
+            </a:endParaRPr>
+          </a:p>
+        </p:txBody>
+      </p:sp>
+      <p:pic>
+        <p:nvPicPr>
+          <p:cNvPr id="22" name="Picture 21">
+            <a:extLst>
+              <a:ext uri="{FF2B5EF4-FFF2-40B4-BE49-F238E27FC236}">
+                <a16:creationId xmlns:a16="http://schemas.microsoft.com/office/drawing/2014/main" id="{89276564-A946-786D-6699-B31E462AC9ED}"/>
+              </a:ext>
+            </a:extLst>
+          </p:cNvPr>
+          <p:cNvPicPr>
+            <a:picLocks noChangeAspect="1"/>
+          </p:cNvPicPr>
+          <p:nvPr/>
+        </p:nvPicPr>
+        <p:blipFill>
+          <a:blip r:embed="rId7"/>
+          <a:stretch>
+            <a:fillRect/>
+          </a:stretch>
+        </p:blipFill>
+        <p:spPr>
+          <a:xfrm>
+            <a:off x="2931410" y="6277402"/>
+            <a:ext cx="376055" cy="307492"/>
+          </a:xfrm>
+          <a:prstGeom prst="rect">
+            <a:avLst/>
+          </a:prstGeom>
+          <a:ln>
+            <a:solidFill>
+              <a:schemeClr val="bg1"/>
+            </a:solidFill>
+          </a:ln>
+        </p:spPr>
+      </p:pic>
+      <p:pic>
+        <p:nvPicPr>
+          <p:cNvPr id="30" name="Picture 29">
+            <a:extLst>
+              <a:ext uri="{FF2B5EF4-FFF2-40B4-BE49-F238E27FC236}">
+                <a16:creationId xmlns:a16="http://schemas.microsoft.com/office/drawing/2014/main" id="{7E8F7698-CAE2-C92D-2438-4109D13F96AC}"/>
+              </a:ext>
+            </a:extLst>
+          </p:cNvPr>
+          <p:cNvPicPr>
+            <a:picLocks noChangeAspect="1"/>
+          </p:cNvPicPr>
+          <p:nvPr/>
+        </p:nvPicPr>
+        <p:blipFill>
+          <a:blip r:embed="rId8"/>
+          <a:stretch>
+            <a:fillRect/>
+          </a:stretch>
+        </p:blipFill>
+        <p:spPr>
+          <a:xfrm>
+            <a:off x="7368674" y="4293787"/>
+            <a:ext cx="4210095" cy="1126364"/>
+          </a:xfrm>
+          <a:prstGeom prst="rect">
+            <a:avLst/>
+          </a:prstGeom>
+        </p:spPr>
+      </p:pic>
+      <p:pic>
+        <p:nvPicPr>
+          <p:cNvPr id="32" name="Picture 31">
+            <a:extLst>
+              <a:ext uri="{FF2B5EF4-FFF2-40B4-BE49-F238E27FC236}">
+                <a16:creationId xmlns:a16="http://schemas.microsoft.com/office/drawing/2014/main" id="{0F26C6CF-8CFE-23D0-BD87-CD78903CE19D}"/>
+              </a:ext>
+            </a:extLst>
+          </p:cNvPr>
+          <p:cNvPicPr>
+            <a:picLocks noChangeAspect="1"/>
+          </p:cNvPicPr>
+          <p:nvPr/>
+        </p:nvPicPr>
+        <p:blipFill>
+          <a:blip r:embed="rId9"/>
+          <a:stretch>
+            <a:fillRect/>
+          </a:stretch>
+        </p:blipFill>
+        <p:spPr>
+          <a:xfrm>
+            <a:off x="7513004" y="1138958"/>
+            <a:ext cx="3921433" cy="2913640"/>
+          </a:xfrm>
+          <a:prstGeom prst="rect">
+            <a:avLst/>
+          </a:prstGeom>
+          <a:effectLst>
+            <a:glow rad="101600">
+              <a:schemeClr val="bg1">
+                <a:lumMod val="75000"/>
+                <a:alpha val="60000"/>
+              </a:schemeClr>
+            </a:glow>
+          </a:effectLst>
+        </p:spPr>
+      </p:pic>
+      <p:pic>
+        <p:nvPicPr>
+          <p:cNvPr id="34" name="Picture 33">
+            <a:extLst>
+              <a:ext uri="{FF2B5EF4-FFF2-40B4-BE49-F238E27FC236}">
+                <a16:creationId xmlns:a16="http://schemas.microsoft.com/office/drawing/2014/main" id="{BC4F9FBB-0C14-221E-DA6F-4F902D53C97A}"/>
+              </a:ext>
+            </a:extLst>
+          </p:cNvPr>
+          <p:cNvPicPr>
+            <a:picLocks noChangeAspect="1"/>
+          </p:cNvPicPr>
+          <p:nvPr/>
+        </p:nvPicPr>
+        <p:blipFill>
+          <a:blip r:embed="rId10">
+            <a:extLst>
+              <a:ext uri="{BEBA8EAE-BF5A-486C-A8C5-ECC9F3942E4B}">
+                <a14:imgProps xmlns:a14="http://schemas.microsoft.com/office/drawing/2010/main">
+                  <a14:imgLayer r:embed="rId11">
+                    <a14:imgEffect>
+                      <a14:brightnessContrast bright="20000"/>
+                    </a14:imgEffect>
+                  </a14:imgLayer>
+                </a14:imgProps>
+              </a:ext>
+            </a:extLst>
+          </a:blip>
+          <a:stretch>
+            <a:fillRect/>
+          </a:stretch>
+        </p:blipFill>
+        <p:spPr>
+          <a:xfrm>
+            <a:off x="8614149" y="52994"/>
+            <a:ext cx="667166" cy="667166"/>
+          </a:xfrm>
+          <a:prstGeom prst="rect">
+            <a:avLst/>
+          </a:prstGeom>
+        </p:spPr>
+      </p:pic>
+      <p:pic>
+        <p:nvPicPr>
+          <p:cNvPr id="36" name="Picture 35" descr="sql1">
+            <a:extLst>
+              <a:ext uri="{FF2B5EF4-FFF2-40B4-BE49-F238E27FC236}">
+                <a16:creationId xmlns:a16="http://schemas.microsoft.com/office/drawing/2014/main" id="{8467578C-613C-62E7-56FB-1E5D349F3150}"/>
+              </a:ext>
+            </a:extLst>
+          </p:cNvPr>
+          <p:cNvPicPr>
+            <a:picLocks noGrp="1" noChangeAspect="1"/>
+          </p:cNvPicPr>
+          <p:nvPr isPhoto="1"/>
+        </p:nvPicPr>
+        <p:blipFill>
+          <a:blip r:embed="rId12">
+            <a:lum/>
+            <a:extLst>
+              <a:ext uri="{28A0092B-C50C-407E-A947-70E740481C1C}">
+                <a14:useLocalDpi xmlns:a14="http://schemas.microsoft.com/office/drawing/2010/main" val="0"/>
+              </a:ext>
+            </a:extLst>
+          </a:blip>
+          <a:stretch>
+            <a:fillRect/>
+          </a:stretch>
+        </p:blipFill>
+        <p:spPr>
+          <a:xfrm>
+            <a:off x="613231" y="1135451"/>
+            <a:ext cx="6215412" cy="4566426"/>
+          </a:xfrm>
+          <a:prstGeom prst="rect">
+            <a:avLst/>
+          </a:prstGeom>
+          <a:effectLst>
+            <a:softEdge rad="635000"/>
+          </a:effectLst>
+        </p:spPr>
+      </p:pic>
     </p:spTree>
+    <p:extLst>
+      <p:ext uri="{BB962C8B-B14F-4D97-AF65-F5344CB8AC3E}">
+        <p14:creationId xmlns:p14="http://schemas.microsoft.com/office/powerpoint/2010/main" val="3943883001"/>
+      </p:ext>
+    </p:extLst>
   </p:cSld>
   <p:clrMapOvr>
     <a:masterClrMapping/>
@@ -14953,6 +15314,338 @@
 </file>
 
 <file path=ppt/slides/slide10.xml><?xml version="1.0" encoding="utf-8"?>
+<p:sld xmlns:a="http://schemas.openxmlformats.org/drawingml/2006/main" xmlns:r="http://schemas.openxmlformats.org/officeDocument/2006/relationships" xmlns:p="http://schemas.openxmlformats.org/presentationml/2006/main">
+  <p:cSld>
+    <p:spTree>
+      <p:nvGrpSpPr>
+        <p:cNvPr id="1" name="">
+          <a:extLst>
+            <a:ext uri="{FF2B5EF4-FFF2-40B4-BE49-F238E27FC236}">
+              <a16:creationId xmlns:a16="http://schemas.microsoft.com/office/drawing/2014/main" id="{80CD98F4-7242-0D8E-D468-0F025BAB5BBD}"/>
+            </a:ext>
+          </a:extLst>
+        </p:cNvPr>
+        <p:cNvGrpSpPr/>
+        <p:nvPr/>
+      </p:nvGrpSpPr>
+      <p:grpSpPr>
+        <a:xfrm>
+          <a:off x="0" y="0"/>
+          <a:ext cx="0" cy="0"/>
+          <a:chOff x="0" y="0"/>
+          <a:chExt cx="0" cy="0"/>
+        </a:xfrm>
+      </p:grpSpPr>
+      <p:sp>
+        <p:nvSpPr>
+          <p:cNvPr id="3" name="Subtitle 2">
+            <a:extLst>
+              <a:ext uri="{FF2B5EF4-FFF2-40B4-BE49-F238E27FC236}">
+                <a16:creationId xmlns:a16="http://schemas.microsoft.com/office/drawing/2014/main" id="{1882ECF1-A576-7602-94FA-6DDB45CC3825}"/>
+              </a:ext>
+            </a:extLst>
+          </p:cNvPr>
+          <p:cNvSpPr>
+            <a:spLocks noGrp="1"/>
+          </p:cNvSpPr>
+          <p:nvPr>
+            <p:ph type="subTitle" idx="1"/>
+          </p:nvPr>
+        </p:nvSpPr>
+        <p:spPr>
+          <a:xfrm>
+            <a:off x="240145" y="0"/>
+            <a:ext cx="11720945" cy="6857999"/>
+          </a:xfrm>
+        </p:spPr>
+        <p:txBody>
+          <a:bodyPr/>
+          <a:lstStyle/>
+          <a:p>
+            <a:pPr algn="l"/>
+            <a:r>
+              <a:rPr lang="en-IN" b="1" dirty="0">
+                <a:solidFill>
+                  <a:srgbClr val="FF0000"/>
+                </a:solidFill>
+                <a:latin typeface="Times New Roman" panose="02020603050405020304" pitchFamily="18" charset="0"/>
+                <a:cs typeface="Times New Roman" panose="02020603050405020304" pitchFamily="18" charset="0"/>
+              </a:rPr>
+              <a:t>Q3:</a:t>
+            </a:r>
+            <a:r>
+              <a:rPr lang="en-US" b="1" dirty="0"/>
+              <a:t>Compare energy production and consumption by country and year.</a:t>
+            </a:r>
+            <a:br>
+              <a:rPr lang="en-US" dirty="0"/>
+            </a:br>
+            <a:endParaRPr lang="en-GB" b="1" dirty="0">
+              <a:solidFill>
+                <a:srgbClr val="FF0000"/>
+              </a:solidFill>
+              <a:latin typeface="Times New Roman" panose="02020603050405020304" pitchFamily="18" charset="0"/>
+              <a:cs typeface="Times New Roman" panose="02020603050405020304" pitchFamily="18" charset="0"/>
+            </a:endParaRPr>
+          </a:p>
+        </p:txBody>
+      </p:sp>
+      <p:sp>
+        <p:nvSpPr>
+          <p:cNvPr id="9" name="Rectangle 8">
+            <a:extLst>
+              <a:ext uri="{FF2B5EF4-FFF2-40B4-BE49-F238E27FC236}">
+                <a16:creationId xmlns:a16="http://schemas.microsoft.com/office/drawing/2014/main" id="{87F054AC-7C1C-7612-2D25-DD0D381097AA}"/>
+              </a:ext>
+            </a:extLst>
+          </p:cNvPr>
+          <p:cNvSpPr/>
+          <p:nvPr/>
+        </p:nvSpPr>
+        <p:spPr>
+          <a:xfrm>
+            <a:off x="129309" y="723016"/>
+            <a:ext cx="11933381" cy="5456111"/>
+          </a:xfrm>
+          <a:prstGeom prst="rect">
+            <a:avLst/>
+          </a:prstGeom>
+          <a:noFill/>
+          <a:ln>
+            <a:solidFill>
+              <a:schemeClr val="tx1"/>
+            </a:solidFill>
+          </a:ln>
+        </p:spPr>
+        <p:style>
+          <a:lnRef idx="2">
+            <a:schemeClr val="accent6"/>
+          </a:lnRef>
+          <a:fillRef idx="1">
+            <a:schemeClr val="lt1"/>
+          </a:fillRef>
+          <a:effectRef idx="0">
+            <a:schemeClr val="accent6"/>
+          </a:effectRef>
+          <a:fontRef idx="minor">
+            <a:schemeClr val="dk1"/>
+          </a:fontRef>
+        </p:style>
+        <p:txBody>
+          <a:bodyPr rtlCol="0" anchor="ctr"/>
+          <a:lstStyle/>
+          <a:p>
+            <a:pPr algn="ctr"/>
+            <a:endParaRPr lang="en-GB"/>
+          </a:p>
+        </p:txBody>
+      </p:sp>
+      <p:sp>
+        <p:nvSpPr>
+          <p:cNvPr id="10" name="Arrow: Right 9">
+            <a:extLst>
+              <a:ext uri="{FF2B5EF4-FFF2-40B4-BE49-F238E27FC236}">
+                <a16:creationId xmlns:a16="http://schemas.microsoft.com/office/drawing/2014/main" id="{661594D6-EC89-A89E-8323-D946883EFAFB}"/>
+              </a:ext>
+            </a:extLst>
+          </p:cNvPr>
+          <p:cNvSpPr/>
+          <p:nvPr/>
+        </p:nvSpPr>
+        <p:spPr>
+          <a:xfrm>
+            <a:off x="5720816" y="3108033"/>
+            <a:ext cx="463887" cy="374073"/>
+          </a:xfrm>
+          <a:prstGeom prst="rightArrow">
+            <a:avLst/>
+          </a:prstGeom>
+        </p:spPr>
+        <p:style>
+          <a:lnRef idx="2">
+            <a:schemeClr val="dk1"/>
+          </a:lnRef>
+          <a:fillRef idx="1">
+            <a:schemeClr val="lt1"/>
+          </a:fillRef>
+          <a:effectRef idx="0">
+            <a:schemeClr val="dk1"/>
+          </a:effectRef>
+          <a:fontRef idx="minor">
+            <a:schemeClr val="dk1"/>
+          </a:fontRef>
+        </p:style>
+        <p:txBody>
+          <a:bodyPr rtlCol="0" anchor="ctr"/>
+          <a:lstStyle/>
+          <a:p>
+            <a:pPr algn="ctr"/>
+            <a:endParaRPr lang="en-GB" dirty="0"/>
+          </a:p>
+        </p:txBody>
+      </p:sp>
+      <p:pic>
+        <p:nvPicPr>
+          <p:cNvPr id="5" name="Picture 4">
+            <a:extLst>
+              <a:ext uri="{FF2B5EF4-FFF2-40B4-BE49-F238E27FC236}">
+                <a16:creationId xmlns:a16="http://schemas.microsoft.com/office/drawing/2014/main" id="{D3528CC2-75DC-D693-9D39-D9EE51B9CEC8}"/>
+              </a:ext>
+            </a:extLst>
+          </p:cNvPr>
+          <p:cNvPicPr>
+            <a:picLocks noChangeAspect="1"/>
+          </p:cNvPicPr>
+          <p:nvPr/>
+        </p:nvPicPr>
+        <p:blipFill>
+          <a:blip r:embed="rId2"/>
+          <a:stretch>
+            <a:fillRect/>
+          </a:stretch>
+        </p:blipFill>
+        <p:spPr>
+          <a:xfrm>
+            <a:off x="6368304" y="1321501"/>
+            <a:ext cx="5530150" cy="3058475"/>
+          </a:xfrm>
+          <a:prstGeom prst="rect">
+            <a:avLst/>
+          </a:prstGeom>
+          <a:ln>
+            <a:solidFill>
+              <a:schemeClr val="accent1"/>
+            </a:solidFill>
+          </a:ln>
+        </p:spPr>
+      </p:pic>
+      <p:pic>
+        <p:nvPicPr>
+          <p:cNvPr id="4" name="Picture 3">
+            <a:extLst>
+              <a:ext uri="{FF2B5EF4-FFF2-40B4-BE49-F238E27FC236}">
+                <a16:creationId xmlns:a16="http://schemas.microsoft.com/office/drawing/2014/main" id="{35F876B1-E0F7-C172-A878-8E273BB370FC}"/>
+              </a:ext>
+            </a:extLst>
+          </p:cNvPr>
+          <p:cNvPicPr>
+            <a:picLocks noChangeAspect="1"/>
+          </p:cNvPicPr>
+          <p:nvPr/>
+        </p:nvPicPr>
+        <p:blipFill>
+          <a:blip r:embed="rId3"/>
+          <a:stretch>
+            <a:fillRect/>
+          </a:stretch>
+        </p:blipFill>
+        <p:spPr>
+          <a:xfrm>
+            <a:off x="423747" y="1425833"/>
+            <a:ext cx="5113468" cy="3138128"/>
+          </a:xfrm>
+          <a:prstGeom prst="rect">
+            <a:avLst/>
+          </a:prstGeom>
+          <a:ln>
+            <a:solidFill>
+              <a:schemeClr val="accent1"/>
+            </a:solidFill>
+          </a:ln>
+        </p:spPr>
+      </p:pic>
+      <p:sp>
+        <p:nvSpPr>
+          <p:cNvPr id="6" name="TextBox 5">
+            <a:extLst>
+              <a:ext uri="{FF2B5EF4-FFF2-40B4-BE49-F238E27FC236}">
+                <a16:creationId xmlns:a16="http://schemas.microsoft.com/office/drawing/2014/main" id="{23335275-5F79-AAA5-CA9C-7C66CD7E98EC}"/>
+              </a:ext>
+            </a:extLst>
+          </p:cNvPr>
+          <p:cNvSpPr txBox="1"/>
+          <p:nvPr/>
+        </p:nvSpPr>
+        <p:spPr>
+          <a:xfrm>
+            <a:off x="347087" y="4563961"/>
+            <a:ext cx="11551367" cy="1938992"/>
+          </a:xfrm>
+          <a:prstGeom prst="rect">
+            <a:avLst/>
+          </a:prstGeom>
+          <a:noFill/>
+        </p:spPr>
+        <p:txBody>
+          <a:bodyPr wrap="square">
+            <a:spAutoFit/>
+          </a:bodyPr>
+          <a:lstStyle/>
+          <a:p>
+            <a:r>
+              <a:rPr lang="en-IN" sz="2000" b="1" dirty="0">
+                <a:latin typeface="Times New Roman" panose="02020603050405020304" pitchFamily="18" charset="0"/>
+                <a:cs typeface="Times New Roman" panose="02020603050405020304" pitchFamily="18" charset="0"/>
+              </a:rPr>
+              <a:t>Insight:</a:t>
+            </a:r>
+          </a:p>
+          <a:p>
+            <a:pPr marL="285750" indent="-285750">
+              <a:buFont typeface="Wingdings" panose="05000000000000000000" pitchFamily="2" charset="2"/>
+              <a:buChar char="§"/>
+            </a:pPr>
+            <a:r>
+              <a:rPr lang="en-GB" sz="2000" dirty="0">
+                <a:latin typeface="Times New Roman" panose="02020603050405020304" pitchFamily="18" charset="0"/>
+                <a:cs typeface="Times New Roman" panose="02020603050405020304" pitchFamily="18" charset="0"/>
+              </a:rPr>
+              <a:t>The gap between production and consumption highlights a country's role as either an energy exporter or importer.</a:t>
+            </a:r>
+          </a:p>
+          <a:p>
+            <a:pPr marL="285750" indent="-285750">
+              <a:buFont typeface="Wingdings" panose="05000000000000000000" pitchFamily="2" charset="2"/>
+              <a:buChar char="§"/>
+            </a:pPr>
+            <a:r>
+              <a:rPr lang="en-GB" sz="2000" dirty="0">
+                <a:latin typeface="Times New Roman" panose="02020603050405020304" pitchFamily="18" charset="0"/>
+                <a:cs typeface="Times New Roman" panose="02020603050405020304" pitchFamily="18" charset="0"/>
+              </a:rPr>
+              <a:t>Highly industrialized nations often consume more energy to support manufacturing, transportation, and economic activities.</a:t>
+            </a:r>
+            <a:endParaRPr lang="en-IN" sz="2000" dirty="0">
+              <a:latin typeface="Times New Roman" panose="02020603050405020304" pitchFamily="18" charset="0"/>
+              <a:cs typeface="Times New Roman" panose="02020603050405020304" pitchFamily="18" charset="0"/>
+            </a:endParaRPr>
+          </a:p>
+          <a:p>
+            <a:pPr marL="285750" indent="-285750">
+              <a:buFont typeface="Wingdings" panose="05000000000000000000" pitchFamily="2" charset="2"/>
+              <a:buChar char="§"/>
+            </a:pPr>
+            <a:endParaRPr lang="en-GB" sz="2000" dirty="0">
+              <a:latin typeface="Times New Roman" panose="02020603050405020304" pitchFamily="18" charset="0"/>
+              <a:cs typeface="Times New Roman" panose="02020603050405020304" pitchFamily="18" charset="0"/>
+            </a:endParaRPr>
+          </a:p>
+        </p:txBody>
+      </p:sp>
+    </p:spTree>
+    <p:extLst>
+      <p:ext uri="{BB962C8B-B14F-4D97-AF65-F5344CB8AC3E}">
+        <p14:creationId xmlns:p14="http://schemas.microsoft.com/office/powerpoint/2010/main" val="1214091314"/>
+      </p:ext>
+    </p:extLst>
+  </p:cSld>
+  <p:clrMapOvr>
+    <a:masterClrMapping/>
+  </p:clrMapOvr>
+</p:sld>
+</file>
+
+<file path=ppt/slides/slide11.xml><?xml version="1.0" encoding="utf-8"?>
 <p:sld xmlns:a="http://schemas.openxmlformats.org/drawingml/2006/main" xmlns:r="http://schemas.openxmlformats.org/officeDocument/2006/relationships" xmlns:p="http://schemas.openxmlformats.org/presentationml/2006/main">
   <p:cSld>
     <p:spTree>
@@ -15199,6 +15892,105 @@
           </a:ln>
         </p:spPr>
       </p:pic>
+      <p:sp>
+        <p:nvSpPr>
+          <p:cNvPr id="4" name="TextBox 3">
+            <a:extLst>
+              <a:ext uri="{FF2B5EF4-FFF2-40B4-BE49-F238E27FC236}">
+                <a16:creationId xmlns:a16="http://schemas.microsoft.com/office/drawing/2014/main" id="{37F705C4-5395-30B3-8761-B506468F63E2}"/>
+              </a:ext>
+            </a:extLst>
+          </p:cNvPr>
+          <p:cNvSpPr txBox="1"/>
+          <p:nvPr/>
+        </p:nvSpPr>
+        <p:spPr>
+          <a:xfrm>
+            <a:off x="397163" y="4029634"/>
+            <a:ext cx="11212946" cy="1631216"/>
+          </a:xfrm>
+          <a:prstGeom prst="rect">
+            <a:avLst/>
+          </a:prstGeom>
+          <a:noFill/>
+        </p:spPr>
+        <p:txBody>
+          <a:bodyPr wrap="square">
+            <a:spAutoFit/>
+          </a:bodyPr>
+          <a:lstStyle/>
+          <a:p>
+            <a:r>
+              <a:rPr lang="en-IN" sz="2000" b="1" dirty="0">
+                <a:latin typeface="Times New Roman" panose="02020603050405020304" pitchFamily="18" charset="0"/>
+                <a:cs typeface="Times New Roman" panose="02020603050405020304" pitchFamily="18" charset="0"/>
+              </a:rPr>
+              <a:t>Insight:</a:t>
+            </a:r>
+          </a:p>
+          <a:p>
+            <a:pPr marL="285750" indent="-285750">
+              <a:buFont typeface="Wingdings" panose="05000000000000000000" pitchFamily="2" charset="2"/>
+              <a:buChar char="§"/>
+            </a:pPr>
+            <a:r>
+              <a:rPr lang="en-GB" sz="2000" b="1" dirty="0">
+                <a:latin typeface="Times New Roman" panose="02020603050405020304" pitchFamily="18" charset="0"/>
+                <a:cs typeface="Times New Roman" panose="02020603050405020304" pitchFamily="18" charset="0"/>
+              </a:rPr>
+              <a:t>CO₂ emissions are the largest contributor</a:t>
+            </a:r>
+            <a:r>
+              <a:rPr lang="en-GB" sz="2000" dirty="0">
+                <a:latin typeface="Times New Roman" panose="02020603050405020304" pitchFamily="18" charset="0"/>
+                <a:cs typeface="Times New Roman" panose="02020603050405020304" pitchFamily="18" charset="0"/>
+              </a:rPr>
+              <a:t>, accounting for </a:t>
+            </a:r>
+            <a:r>
+              <a:rPr lang="en-GB" sz="2000" b="1" dirty="0">
+                <a:latin typeface="Times New Roman" panose="02020603050405020304" pitchFamily="18" charset="0"/>
+                <a:cs typeface="Times New Roman" panose="02020603050405020304" pitchFamily="18" charset="0"/>
+              </a:rPr>
+              <a:t>142,723 </a:t>
+            </a:r>
+            <a:r>
+              <a:rPr lang="en-GB" sz="2000" b="1" dirty="0" err="1">
+                <a:latin typeface="Times New Roman" panose="02020603050405020304" pitchFamily="18" charset="0"/>
+                <a:cs typeface="Times New Roman" panose="02020603050405020304" pitchFamily="18" charset="0"/>
+              </a:rPr>
+              <a:t>MMtonnes</a:t>
+            </a:r>
+            <a:r>
+              <a:rPr lang="en-GB" sz="2000" b="1" dirty="0">
+                <a:latin typeface="Times New Roman" panose="02020603050405020304" pitchFamily="18" charset="0"/>
+                <a:cs typeface="Times New Roman" panose="02020603050405020304" pitchFamily="18" charset="0"/>
+              </a:rPr>
+              <a:t> CO₂</a:t>
+            </a:r>
+            <a:r>
+              <a:rPr lang="en-GB" sz="2000" dirty="0">
+                <a:latin typeface="Times New Roman" panose="02020603050405020304" pitchFamily="18" charset="0"/>
+                <a:cs typeface="Times New Roman" panose="02020603050405020304" pitchFamily="18" charset="0"/>
+              </a:rPr>
+              <a:t>, significantly higher than emissions from coal and coke, petroleum, and natural gas.</a:t>
+            </a:r>
+          </a:p>
+          <a:p>
+            <a:pPr marL="285750" indent="-285750">
+              <a:buFont typeface="Wingdings" panose="05000000000000000000" pitchFamily="2" charset="2"/>
+              <a:buChar char="§"/>
+            </a:pPr>
+            <a:r>
+              <a:rPr lang="en-GB" sz="2000" dirty="0">
+                <a:latin typeface="Times New Roman" panose="02020603050405020304" pitchFamily="18" charset="0"/>
+                <a:cs typeface="Times New Roman" panose="02020603050405020304" pitchFamily="18" charset="0"/>
+              </a:rPr>
+              <a:t>The results highlight the dominant role of CO₂ emissions in the overall emissions profile and emphasize the environmental impact associated with energy production and consumption.</a:t>
+            </a:r>
+          </a:p>
+        </p:txBody>
+      </p:sp>
     </p:spTree>
     <p:extLst>
       <p:ext uri="{BB962C8B-B14F-4D97-AF65-F5344CB8AC3E}">
@@ -15212,7 +16004,7 @@
 </p:sld>
 </file>
 
-<file path=ppt/slides/slide11.xml><?xml version="1.0" encoding="utf-8"?>
+<file path=ppt/slides/slide12.xml><?xml version="1.0" encoding="utf-8"?>
 <p:sld xmlns:a="http://schemas.openxmlformats.org/drawingml/2006/main" xmlns:r="http://schemas.openxmlformats.org/officeDocument/2006/relationships" xmlns:p="http://schemas.openxmlformats.org/presentationml/2006/main">
   <p:cSld>
     <p:spTree>
@@ -15478,6 +16270,219 @@
           </a:ln>
         </p:spPr>
       </p:pic>
+      <p:sp>
+        <p:nvSpPr>
+          <p:cNvPr id="6" name="TextBox 5">
+            <a:extLst>
+              <a:ext uri="{FF2B5EF4-FFF2-40B4-BE49-F238E27FC236}">
+                <a16:creationId xmlns:a16="http://schemas.microsoft.com/office/drawing/2014/main" id="{9C29FD4A-11EA-B8F0-4A32-2023D3AC6772}"/>
+              </a:ext>
+            </a:extLst>
+          </p:cNvPr>
+          <p:cNvSpPr txBox="1"/>
+          <p:nvPr/>
+        </p:nvSpPr>
+        <p:spPr>
+          <a:xfrm>
+            <a:off x="341746" y="4343905"/>
+            <a:ext cx="6096000" cy="1015663"/>
+          </a:xfrm>
+          <a:prstGeom prst="rect">
+            <a:avLst/>
+          </a:prstGeom>
+          <a:noFill/>
+        </p:spPr>
+        <p:txBody>
+          <a:bodyPr wrap="square">
+            <a:spAutoFit/>
+          </a:bodyPr>
+          <a:lstStyle/>
+          <a:p>
+            <a:r>
+              <a:rPr lang="en-IN" sz="2000" b="1" dirty="0">
+                <a:latin typeface="Times New Roman" panose="02020603050405020304" pitchFamily="18" charset="0"/>
+                <a:cs typeface="Times New Roman" panose="02020603050405020304" pitchFamily="18" charset="0"/>
+              </a:rPr>
+              <a:t>Insight:</a:t>
+            </a:r>
+          </a:p>
+          <a:p>
+            <a:endParaRPr lang="en-IN" sz="2000" b="1" dirty="0">
+              <a:latin typeface="Times New Roman" panose="02020603050405020304" pitchFamily="18" charset="0"/>
+              <a:cs typeface="Times New Roman" panose="02020603050405020304" pitchFamily="18" charset="0"/>
+            </a:endParaRPr>
+          </a:p>
+          <a:p>
+            <a:pPr marL="285750" indent="-285750">
+              <a:buFont typeface="Wingdings" panose="05000000000000000000" pitchFamily="2" charset="2"/>
+              <a:buChar char="§"/>
+            </a:pPr>
+            <a:endParaRPr lang="en-GB" sz="2000" dirty="0">
+              <a:latin typeface="Times New Roman" panose="02020603050405020304" pitchFamily="18" charset="0"/>
+              <a:cs typeface="Times New Roman" panose="02020603050405020304" pitchFamily="18" charset="0"/>
+            </a:endParaRPr>
+          </a:p>
+        </p:txBody>
+      </p:sp>
+      <p:sp>
+        <p:nvSpPr>
+          <p:cNvPr id="12" name="Rectangle 4">
+            <a:extLst>
+              <a:ext uri="{FF2B5EF4-FFF2-40B4-BE49-F238E27FC236}">
+                <a16:creationId xmlns:a16="http://schemas.microsoft.com/office/drawing/2014/main" id="{76E71C7E-DB67-1426-FE7B-F3D89917FBE5}"/>
+              </a:ext>
+            </a:extLst>
+          </p:cNvPr>
+          <p:cNvSpPr>
+            <a:spLocks noChangeArrowheads="1"/>
+          </p:cNvSpPr>
+          <p:nvPr/>
+        </p:nvSpPr>
+        <p:spPr bwMode="auto">
+          <a:xfrm>
+            <a:off x="341746" y="4456882"/>
+            <a:ext cx="11251798" cy="1015663"/>
+          </a:xfrm>
+          <a:prstGeom prst="rect">
+            <a:avLst/>
+          </a:prstGeom>
+          <a:noFill/>
+          <a:ln>
+            <a:noFill/>
+          </a:ln>
+          <a:effectLst/>
+          <a:extLst>
+            <a:ext uri="{909E8E84-426E-40DD-AFC4-6F175D3DCCD1}">
+              <a14:hiddenFill xmlns:a14="http://schemas.microsoft.com/office/drawing/2010/main">
+                <a:solidFill>
+                  <a:schemeClr val="accent1"/>
+                </a:solidFill>
+              </a14:hiddenFill>
+            </a:ext>
+            <a:ext uri="{91240B29-F687-4F45-9708-019B960494DF}">
+              <a14:hiddenLine xmlns:a14="http://schemas.microsoft.com/office/drawing/2010/main" w="9525">
+                <a:solidFill>
+                  <a:schemeClr val="tx1"/>
+                </a:solidFill>
+                <a:miter lim="800000"/>
+                <a:headEnd/>
+                <a:tailEnd/>
+              </a14:hiddenLine>
+            </a:ext>
+            <a:ext uri="{AF507438-7753-43E0-B8FC-AC1667EBCBE1}">
+              <a14:hiddenEffects xmlns:a14="http://schemas.microsoft.com/office/drawing/2010/main">
+                <a:effectLst>
+                  <a:outerShdw dist="35921" dir="2700000" algn="ctr" rotWithShape="0">
+                    <a:schemeClr val="bg2"/>
+                  </a:outerShdw>
+                </a:effectLst>
+              </a14:hiddenEffects>
+            </a:ext>
+          </a:extLst>
+        </p:spPr>
+        <p:txBody>
+          <a:bodyPr vert="horz" wrap="none" lIns="91440" tIns="45720" rIns="91440" bIns="45720" numCol="1" anchor="ctr" anchorCtr="0" compatLnSpc="1">
+            <a:prstTxWarp prst="textNoShape">
+              <a:avLst/>
+            </a:prstTxWarp>
+            <a:spAutoFit/>
+          </a:bodyPr>
+          <a:lstStyle/>
+          <a:p>
+            <a:pPr marL="342900" marR="0" lvl="0" indent="-342900" algn="l" defTabSz="914400" rtl="0" eaLnBrk="0" fontAlgn="base" latinLnBrk="0" hangingPunct="0">
+              <a:lnSpc>
+                <a:spcPct val="100000"/>
+              </a:lnSpc>
+              <a:spcBef>
+                <a:spcPct val="0"/>
+              </a:spcBef>
+              <a:spcAft>
+                <a:spcPct val="0"/>
+              </a:spcAft>
+              <a:buClrTx/>
+              <a:buSzTx/>
+              <a:buFont typeface="Wingdings" panose="05000000000000000000" pitchFamily="2" charset="2"/>
+              <a:buChar char="§"/>
+              <a:tabLst/>
+            </a:pPr>
+            <a:endParaRPr kumimoji="0" lang="en-US" altLang="en-US" sz="2000" b="0" i="0" u="none" strike="noStrike" cap="none" normalizeH="0" baseline="0" dirty="0">
+              <a:ln>
+                <a:noFill/>
+              </a:ln>
+              <a:solidFill>
+                <a:schemeClr val="tx1"/>
+              </a:solidFill>
+              <a:effectLst/>
+              <a:latin typeface="Times New Roman" panose="02020603050405020304" pitchFamily="18" charset="0"/>
+              <a:cs typeface="Times New Roman" panose="02020603050405020304" pitchFamily="18" charset="0"/>
+            </a:endParaRPr>
+          </a:p>
+          <a:p>
+            <a:pPr marL="342900" marR="0" lvl="0" indent="-342900" algn="l" defTabSz="914400" rtl="0" eaLnBrk="0" fontAlgn="base" latinLnBrk="0" hangingPunct="0">
+              <a:lnSpc>
+                <a:spcPct val="100000"/>
+              </a:lnSpc>
+              <a:spcBef>
+                <a:spcPct val="0"/>
+              </a:spcBef>
+              <a:spcAft>
+                <a:spcPct val="0"/>
+              </a:spcAft>
+              <a:buClrTx/>
+              <a:buSzTx/>
+              <a:buFont typeface="Wingdings" panose="05000000000000000000" pitchFamily="2" charset="2"/>
+              <a:buChar char="§"/>
+              <a:tabLst/>
+            </a:pPr>
+            <a:r>
+              <a:rPr kumimoji="0" lang="en-US" altLang="en-US" sz="2000" b="0" i="0" u="none" strike="noStrike" cap="none" normalizeH="0" baseline="0" dirty="0">
+                <a:ln>
+                  <a:noFill/>
+                </a:ln>
+                <a:solidFill>
+                  <a:schemeClr val="tx1"/>
+                </a:solidFill>
+                <a:effectLst/>
+                <a:latin typeface="Times New Roman" panose="02020603050405020304" pitchFamily="18" charset="0"/>
+                <a:cs typeface="Times New Roman" panose="02020603050405020304" pitchFamily="18" charset="0"/>
+              </a:rPr>
+              <a:t> Global emissions show an overall increasing trend over the years. </a:t>
+            </a:r>
+          </a:p>
+          <a:p>
+            <a:pPr marL="342900" marR="0" lvl="0" indent="-342900" algn="l" defTabSz="914400" rtl="0" eaLnBrk="0" fontAlgn="base" latinLnBrk="0" hangingPunct="0">
+              <a:lnSpc>
+                <a:spcPct val="100000"/>
+              </a:lnSpc>
+              <a:spcBef>
+                <a:spcPct val="0"/>
+              </a:spcBef>
+              <a:spcAft>
+                <a:spcPct val="0"/>
+              </a:spcAft>
+              <a:buClrTx/>
+              <a:buSzTx/>
+              <a:buFont typeface="Wingdings" panose="05000000000000000000" pitchFamily="2" charset="2"/>
+              <a:buChar char="§"/>
+              <a:tabLst/>
+            </a:pPr>
+            <a:r>
+              <a:rPr kumimoji="0" lang="en-US" altLang="en-US" sz="2000" b="0" i="0" u="none" strike="noStrike" cap="none" normalizeH="0" baseline="0" dirty="0">
+                <a:ln>
+                  <a:noFill/>
+                </a:ln>
+                <a:solidFill>
+                  <a:schemeClr val="tx1"/>
+                </a:solidFill>
+                <a:effectLst/>
+                <a:latin typeface="Times New Roman" panose="02020603050405020304" pitchFamily="18" charset="0"/>
+                <a:cs typeface="Times New Roman" panose="02020603050405020304" pitchFamily="18" charset="0"/>
+              </a:rPr>
+              <a:t> Economic expansion, industrialization, and population growth continue to drive higher emission levels. </a:t>
+            </a:r>
+          </a:p>
+        </p:txBody>
+      </p:sp>
     </p:spTree>
     <p:extLst>
       <p:ext uri="{BB962C8B-B14F-4D97-AF65-F5344CB8AC3E}">
@@ -15491,7 +16496,7 @@
 </p:sld>
 </file>
 
-<file path=ppt/slides/slide12.xml><?xml version="1.0" encoding="utf-8"?>
+<file path=ppt/slides/slide13.xml><?xml version="1.0" encoding="utf-8"?>
 <p:sld xmlns:a="http://schemas.openxmlformats.org/drawingml/2006/main" xmlns:r="http://schemas.openxmlformats.org/officeDocument/2006/relationships" xmlns:p="http://schemas.openxmlformats.org/presentationml/2006/main">
   <p:cSld>
     <p:spTree>
@@ -15744,6 +16749,219 @@
           </a:ln>
         </p:spPr>
       </p:pic>
+      <p:sp>
+        <p:nvSpPr>
+          <p:cNvPr id="5" name="TextBox 4">
+            <a:extLst>
+              <a:ext uri="{FF2B5EF4-FFF2-40B4-BE49-F238E27FC236}">
+                <a16:creationId xmlns:a16="http://schemas.microsoft.com/office/drawing/2014/main" id="{B6BCDA44-23AA-8F74-5991-AAEFA176E8A8}"/>
+              </a:ext>
+            </a:extLst>
+          </p:cNvPr>
+          <p:cNvSpPr txBox="1"/>
+          <p:nvPr/>
+        </p:nvSpPr>
+        <p:spPr>
+          <a:xfrm>
+            <a:off x="240145" y="4928813"/>
+            <a:ext cx="6096000" cy="1015663"/>
+          </a:xfrm>
+          <a:prstGeom prst="rect">
+            <a:avLst/>
+          </a:prstGeom>
+          <a:noFill/>
+        </p:spPr>
+        <p:txBody>
+          <a:bodyPr wrap="square">
+            <a:spAutoFit/>
+          </a:bodyPr>
+          <a:lstStyle/>
+          <a:p>
+            <a:r>
+              <a:rPr lang="en-IN" sz="2000" b="1" dirty="0">
+                <a:latin typeface="Times New Roman" panose="02020603050405020304" pitchFamily="18" charset="0"/>
+                <a:cs typeface="Times New Roman" panose="02020603050405020304" pitchFamily="18" charset="0"/>
+              </a:rPr>
+              <a:t>Insight:</a:t>
+            </a:r>
+          </a:p>
+          <a:p>
+            <a:endParaRPr lang="en-IN" sz="2000" b="1" dirty="0">
+              <a:latin typeface="Times New Roman" panose="02020603050405020304" pitchFamily="18" charset="0"/>
+              <a:cs typeface="Times New Roman" panose="02020603050405020304" pitchFamily="18" charset="0"/>
+            </a:endParaRPr>
+          </a:p>
+          <a:p>
+            <a:pPr marL="285750" indent="-285750">
+              <a:buFont typeface="Wingdings" panose="05000000000000000000" pitchFamily="2" charset="2"/>
+              <a:buChar char="§"/>
+            </a:pPr>
+            <a:endParaRPr lang="en-GB" sz="2000" dirty="0">
+              <a:latin typeface="Times New Roman" panose="02020603050405020304" pitchFamily="18" charset="0"/>
+              <a:cs typeface="Times New Roman" panose="02020603050405020304" pitchFamily="18" charset="0"/>
+            </a:endParaRPr>
+          </a:p>
+        </p:txBody>
+      </p:sp>
+      <p:sp>
+        <p:nvSpPr>
+          <p:cNvPr id="6" name="Rectangle 1">
+            <a:extLst>
+              <a:ext uri="{FF2B5EF4-FFF2-40B4-BE49-F238E27FC236}">
+                <a16:creationId xmlns:a16="http://schemas.microsoft.com/office/drawing/2014/main" id="{44D31EEE-5E8B-1F10-985A-3D676EC5B412}"/>
+              </a:ext>
+            </a:extLst>
+          </p:cNvPr>
+          <p:cNvSpPr>
+            <a:spLocks noChangeArrowheads="1"/>
+          </p:cNvSpPr>
+          <p:nvPr/>
+        </p:nvSpPr>
+        <p:spPr bwMode="auto">
+          <a:xfrm>
+            <a:off x="143015" y="4960905"/>
+            <a:ext cx="11662167" cy="1015663"/>
+          </a:xfrm>
+          <a:prstGeom prst="rect">
+            <a:avLst/>
+          </a:prstGeom>
+          <a:noFill/>
+          <a:ln>
+            <a:noFill/>
+          </a:ln>
+          <a:effectLst/>
+          <a:extLst>
+            <a:ext uri="{909E8E84-426E-40DD-AFC4-6F175D3DCCD1}">
+              <a14:hiddenFill xmlns:a14="http://schemas.microsoft.com/office/drawing/2010/main">
+                <a:solidFill>
+                  <a:schemeClr val="accent1"/>
+                </a:solidFill>
+              </a14:hiddenFill>
+            </a:ext>
+            <a:ext uri="{91240B29-F687-4F45-9708-019B960494DF}">
+              <a14:hiddenLine xmlns:a14="http://schemas.microsoft.com/office/drawing/2010/main" w="9525">
+                <a:solidFill>
+                  <a:schemeClr val="tx1"/>
+                </a:solidFill>
+                <a:miter lim="800000"/>
+                <a:headEnd/>
+                <a:tailEnd/>
+              </a14:hiddenLine>
+            </a:ext>
+            <a:ext uri="{AF507438-7753-43E0-B8FC-AC1667EBCBE1}">
+              <a14:hiddenEffects xmlns:a14="http://schemas.microsoft.com/office/drawing/2010/main">
+                <a:effectLst>
+                  <a:outerShdw dist="35921" dir="2700000" algn="ctr" rotWithShape="0">
+                    <a:schemeClr val="bg2"/>
+                  </a:outerShdw>
+                </a:effectLst>
+              </a14:hiddenEffects>
+            </a:ext>
+          </a:extLst>
+        </p:spPr>
+        <p:txBody>
+          <a:bodyPr vert="horz" wrap="none" lIns="91440" tIns="45720" rIns="91440" bIns="45720" numCol="1" anchor="ctr" anchorCtr="0" compatLnSpc="1">
+            <a:prstTxWarp prst="textNoShape">
+              <a:avLst/>
+            </a:prstTxWarp>
+            <a:spAutoFit/>
+          </a:bodyPr>
+          <a:lstStyle/>
+          <a:p>
+            <a:pPr marL="342900" marR="0" lvl="0" indent="-342900" algn="l" defTabSz="914400" rtl="0" eaLnBrk="0" fontAlgn="base" latinLnBrk="0" hangingPunct="0">
+              <a:lnSpc>
+                <a:spcPct val="100000"/>
+              </a:lnSpc>
+              <a:spcBef>
+                <a:spcPct val="0"/>
+              </a:spcBef>
+              <a:spcAft>
+                <a:spcPct val="0"/>
+              </a:spcAft>
+              <a:buClrTx/>
+              <a:buSzTx/>
+              <a:buFont typeface="Wingdings" panose="05000000000000000000" pitchFamily="2" charset="2"/>
+              <a:buChar char="§"/>
+              <a:tabLst/>
+            </a:pPr>
+            <a:endParaRPr kumimoji="0" lang="en-US" altLang="en-US" sz="2000" b="0" i="0" u="none" strike="noStrike" cap="none" normalizeH="0" baseline="0" dirty="0">
+              <a:ln>
+                <a:noFill/>
+              </a:ln>
+              <a:solidFill>
+                <a:schemeClr val="tx1"/>
+              </a:solidFill>
+              <a:effectLst/>
+              <a:latin typeface="Times New Roman" panose="02020603050405020304" pitchFamily="18" charset="0"/>
+              <a:cs typeface="Times New Roman" panose="02020603050405020304" pitchFamily="18" charset="0"/>
+            </a:endParaRPr>
+          </a:p>
+          <a:p>
+            <a:pPr marL="342900" marR="0" lvl="0" indent="-342900" algn="l" defTabSz="914400" rtl="0" eaLnBrk="0" fontAlgn="base" latinLnBrk="0" hangingPunct="0">
+              <a:lnSpc>
+                <a:spcPct val="100000"/>
+              </a:lnSpc>
+              <a:spcBef>
+                <a:spcPct val="0"/>
+              </a:spcBef>
+              <a:spcAft>
+                <a:spcPct val="0"/>
+              </a:spcAft>
+              <a:buClrTx/>
+              <a:buSzTx/>
+              <a:buFont typeface="Wingdings" panose="05000000000000000000" pitchFamily="2" charset="2"/>
+              <a:buChar char="§"/>
+              <a:tabLst/>
+            </a:pPr>
+            <a:r>
+              <a:rPr kumimoji="0" lang="en-US" altLang="en-US" sz="2000" b="0" i="0" u="none" strike="noStrike" cap="none" normalizeH="0" baseline="0" dirty="0">
+                <a:ln>
+                  <a:noFill/>
+                </a:ln>
+                <a:solidFill>
+                  <a:schemeClr val="tx1"/>
+                </a:solidFill>
+                <a:effectLst/>
+                <a:latin typeface="Times New Roman" panose="02020603050405020304" pitchFamily="18" charset="0"/>
+                <a:cs typeface="Times New Roman" panose="02020603050405020304" pitchFamily="18" charset="0"/>
+              </a:rPr>
+              <a:t>Most countries demonstrate a positive GDP growth trend over time. </a:t>
+            </a:r>
+          </a:p>
+          <a:p>
+            <a:pPr marL="342900" marR="0" lvl="0" indent="-342900" algn="l" defTabSz="914400" rtl="0" eaLnBrk="0" fontAlgn="base" latinLnBrk="0" hangingPunct="0">
+              <a:lnSpc>
+                <a:spcPct val="100000"/>
+              </a:lnSpc>
+              <a:spcBef>
+                <a:spcPct val="0"/>
+              </a:spcBef>
+              <a:spcAft>
+                <a:spcPct val="0"/>
+              </a:spcAft>
+              <a:buClrTx/>
+              <a:buSzTx/>
+              <a:buFont typeface="Wingdings" panose="05000000000000000000" pitchFamily="2" charset="2"/>
+              <a:buChar char="§"/>
+              <a:tabLst/>
+            </a:pPr>
+            <a:r>
+              <a:rPr kumimoji="0" lang="en-US" altLang="en-US" sz="2000" b="0" i="0" u="none" strike="noStrike" cap="none" normalizeH="0" baseline="0" dirty="0">
+                <a:ln>
+                  <a:noFill/>
+                </a:ln>
+                <a:solidFill>
+                  <a:schemeClr val="tx1"/>
+                </a:solidFill>
+                <a:effectLst/>
+                <a:latin typeface="Times New Roman" panose="02020603050405020304" pitchFamily="18" charset="0"/>
+                <a:cs typeface="Times New Roman" panose="02020603050405020304" pitchFamily="18" charset="0"/>
+              </a:rPr>
+              <a:t>Developed economies show steady growth, while emerging economies often experience faster growth rates. </a:t>
+            </a:r>
+          </a:p>
+        </p:txBody>
+      </p:sp>
     </p:spTree>
     <p:extLst>
       <p:ext uri="{BB962C8B-B14F-4D97-AF65-F5344CB8AC3E}">
@@ -15757,7 +16975,7 @@
 </p:sld>
 </file>
 
-<file path=ppt/slides/slide13.xml><?xml version="1.0" encoding="utf-8"?>
+<file path=ppt/slides/slide14.xml><?xml version="1.0" encoding="utf-8"?>
 <p:sld xmlns:a="http://schemas.openxmlformats.org/drawingml/2006/main" xmlns:r="http://schemas.openxmlformats.org/officeDocument/2006/relationships" xmlns:p="http://schemas.openxmlformats.org/presentationml/2006/main">
   <p:cSld>
     <p:spTree>
@@ -15956,7 +17174,7 @@
         </p:blipFill>
         <p:spPr>
           <a:xfrm>
-            <a:off x="7547611" y="1235619"/>
+            <a:off x="7531040" y="929347"/>
             <a:ext cx="4464279" cy="4211781"/>
           </a:xfrm>
           <a:prstGeom prst="rect">
@@ -15994,7 +17212,7 @@
         </p:blipFill>
         <p:spPr>
           <a:xfrm>
-            <a:off x="240145" y="1400402"/>
+            <a:off x="240145" y="1206984"/>
             <a:ext cx="6394233" cy="3541053"/>
           </a:xfrm>
           <a:prstGeom prst="rect">
@@ -16010,6 +17228,84 @@
           </a:ln>
         </p:spPr>
       </p:pic>
+      <p:sp>
+        <p:nvSpPr>
+          <p:cNvPr id="5" name="TextBox 4">
+            <a:extLst>
+              <a:ext uri="{FF2B5EF4-FFF2-40B4-BE49-F238E27FC236}">
+                <a16:creationId xmlns:a16="http://schemas.microsoft.com/office/drawing/2014/main" id="{4A543CD1-E524-9020-4BCA-23857AF815A5}"/>
+              </a:ext>
+            </a:extLst>
+          </p:cNvPr>
+          <p:cNvSpPr txBox="1"/>
+          <p:nvPr/>
+        </p:nvSpPr>
+        <p:spPr>
+          <a:xfrm>
+            <a:off x="240145" y="4764237"/>
+            <a:ext cx="7307466" cy="1754326"/>
+          </a:xfrm>
+          <a:prstGeom prst="rect">
+            <a:avLst/>
+          </a:prstGeom>
+          <a:noFill/>
+        </p:spPr>
+        <p:txBody>
+          <a:bodyPr wrap="square">
+            <a:spAutoFit/>
+          </a:bodyPr>
+          <a:lstStyle/>
+          <a:p>
+            <a:r>
+              <a:rPr lang="en-IN" sz="1800" b="1" dirty="0">
+                <a:latin typeface="Times New Roman" panose="02020603050405020304" pitchFamily="18" charset="0"/>
+                <a:cs typeface="Times New Roman" panose="02020603050405020304" pitchFamily="18" charset="0"/>
+              </a:rPr>
+              <a:t>Insight:</a:t>
+            </a:r>
+          </a:p>
+          <a:p>
+            <a:pPr marL="285750" indent="-285750">
+              <a:buFont typeface="Wingdings" panose="05000000000000000000" pitchFamily="2" charset="2"/>
+              <a:buChar char="§"/>
+            </a:pPr>
+            <a:r>
+              <a:rPr lang="en-GB" sz="1800" dirty="0">
+                <a:latin typeface="Times New Roman" panose="02020603050405020304" pitchFamily="18" charset="0"/>
+                <a:cs typeface="Times New Roman" panose="02020603050405020304" pitchFamily="18" charset="0"/>
+              </a:rPr>
+              <a:t>Countries with growing populations tend to experience higher emissions due to increased energy requirements.</a:t>
+            </a:r>
+          </a:p>
+          <a:p>
+            <a:pPr marL="285750" indent="-285750">
+              <a:buFont typeface="Wingdings" panose="05000000000000000000" pitchFamily="2" charset="2"/>
+              <a:buChar char="§"/>
+            </a:pPr>
+            <a:r>
+              <a:rPr lang="en-GB" sz="1800" dirty="0">
+                <a:latin typeface="Times New Roman" panose="02020603050405020304" pitchFamily="18" charset="0"/>
+                <a:cs typeface="Times New Roman" panose="02020603050405020304" pitchFamily="18" charset="0"/>
+              </a:rPr>
+              <a:t>Population growth is a key driver of long-term energy demand and environmental pressure.</a:t>
+            </a:r>
+            <a:endParaRPr lang="en-IN" sz="1800" b="1" dirty="0">
+              <a:latin typeface="Times New Roman" panose="02020603050405020304" pitchFamily="18" charset="0"/>
+              <a:cs typeface="Times New Roman" panose="02020603050405020304" pitchFamily="18" charset="0"/>
+            </a:endParaRPr>
+          </a:p>
+          <a:p>
+            <a:pPr marL="285750" indent="-285750">
+              <a:buFont typeface="Wingdings" panose="05000000000000000000" pitchFamily="2" charset="2"/>
+              <a:buChar char="§"/>
+            </a:pPr>
+            <a:endParaRPr lang="en-GB" sz="1800" dirty="0">
+              <a:latin typeface="Times New Roman" panose="02020603050405020304" pitchFamily="18" charset="0"/>
+              <a:cs typeface="Times New Roman" panose="02020603050405020304" pitchFamily="18" charset="0"/>
+            </a:endParaRPr>
+          </a:p>
+        </p:txBody>
+      </p:sp>
     </p:spTree>
     <p:extLst>
       <p:ext uri="{BB962C8B-B14F-4D97-AF65-F5344CB8AC3E}">
@@ -16023,7 +17319,7 @@
 </p:sld>
 </file>
 
-<file path=ppt/slides/slide14.xml><?xml version="1.0" encoding="utf-8"?>
+<file path=ppt/slides/slide15.xml><?xml version="1.0" encoding="utf-8"?>
 <p:sld xmlns:a="http://schemas.openxmlformats.org/drawingml/2006/main" xmlns:r="http://schemas.openxmlformats.org/officeDocument/2006/relationships" xmlns:p="http://schemas.openxmlformats.org/presentationml/2006/main">
   <p:cSld>
     <p:spTree>
@@ -16291,7 +17587,7 @@
         <p:spPr>
           <a:xfrm>
             <a:off x="611708" y="4909249"/>
-            <a:ext cx="6096000" cy="646331"/>
+            <a:ext cx="6096000" cy="1015663"/>
           </a:xfrm>
           <a:prstGeom prst="rect">
             <a:avLst/>
@@ -16305,20 +17601,20 @@
           <a:lstStyle/>
           <a:p>
             <a:r>
-              <a:rPr lang="en-IN" sz="1800" b="1" dirty="0">
+              <a:rPr lang="en-IN" sz="2000" b="1" dirty="0">
                 <a:latin typeface="Times New Roman" panose="02020603050405020304" pitchFamily="18" charset="0"/>
                 <a:cs typeface="Times New Roman" panose="02020603050405020304" pitchFamily="18" charset="0"/>
               </a:rPr>
               <a:t>Insight:</a:t>
             </a:r>
-            <a:endParaRPr lang="en-IN" sz="1800" dirty="0">
+            <a:endParaRPr lang="en-IN" sz="2000" dirty="0">
               <a:latin typeface="Times New Roman" panose="02020603050405020304" pitchFamily="18" charset="0"/>
               <a:cs typeface="Times New Roman" panose="02020603050405020304" pitchFamily="18" charset="0"/>
             </a:endParaRPr>
           </a:p>
           <a:p>
             <a:r>
-              <a:rPr lang="en-IN" sz="1800" dirty="0">
+              <a:rPr lang="en-IN" sz="2000" dirty="0">
                 <a:latin typeface="Times New Roman" panose="02020603050405020304" pitchFamily="18" charset="0"/>
                 <a:cs typeface="Times New Roman" panose="02020603050405020304" pitchFamily="18" charset="0"/>
               </a:rPr>
@@ -16340,7 +17636,7 @@
 </p:sld>
 </file>
 
-<file path=ppt/slides/slide15.xml><?xml version="1.0" encoding="utf-8"?>
+<file path=ppt/slides/slide16.xml><?xml version="1.0" encoding="utf-8"?>
 <p:sld xmlns:a="http://schemas.openxmlformats.org/drawingml/2006/main" xmlns:r="http://schemas.openxmlformats.org/officeDocument/2006/relationships" xmlns:p="http://schemas.openxmlformats.org/presentationml/2006/main">
   <p:cSld>
     <p:spTree>
@@ -16627,7 +17923,7 @@
         <p:spPr>
           <a:xfrm>
             <a:off x="452582" y="4302993"/>
-            <a:ext cx="6096000" cy="923330"/>
+            <a:ext cx="6096000" cy="1015663"/>
           </a:xfrm>
           <a:prstGeom prst="rect">
             <a:avLst/>
@@ -16641,7 +17937,7 @@
           <a:lstStyle/>
           <a:p>
             <a:r>
-              <a:rPr lang="en-IN" sz="1800" b="1" dirty="0">
+              <a:rPr lang="en-IN" sz="2000" b="1" dirty="0">
                 <a:latin typeface="Times New Roman" panose="02020603050405020304" pitchFamily="18" charset="0"/>
                 <a:cs typeface="Times New Roman" panose="02020603050405020304" pitchFamily="18" charset="0"/>
               </a:rPr>
@@ -16650,13 +17946,13 @@
           </a:p>
           <a:p>
             <a:r>
-              <a:rPr lang="en-US" sz="1800" dirty="0">
+              <a:rPr lang="en-US" sz="2000" dirty="0">
                 <a:latin typeface="Times New Roman" panose="02020603050405020304" pitchFamily="18" charset="0"/>
                 <a:cs typeface="Times New Roman" panose="02020603050405020304" pitchFamily="18" charset="0"/>
               </a:rPr>
               <a:t>The emissions-to-GDP ratio measures the amount of emissions generated per unit of economic output</a:t>
             </a:r>
-            <a:endParaRPr lang="en-IN" sz="1800" dirty="0">
+            <a:endParaRPr lang="en-IN" sz="2000" dirty="0">
               <a:latin typeface="Times New Roman" panose="02020603050405020304" pitchFamily="18" charset="0"/>
               <a:cs typeface="Times New Roman" panose="02020603050405020304" pitchFamily="18" charset="0"/>
             </a:endParaRPr>
@@ -16676,7 +17972,7 @@
 </p:sld>
 </file>
 
-<file path=ppt/slides/slide16.xml><?xml version="1.0" encoding="utf-8"?>
+<file path=ppt/slides/slide17.xml><?xml version="1.0" encoding="utf-8"?>
 <p:sld xmlns:a="http://schemas.openxmlformats.org/drawingml/2006/main" xmlns:r="http://schemas.openxmlformats.org/officeDocument/2006/relationships" xmlns:p="http://schemas.openxmlformats.org/presentationml/2006/main">
   <p:cSld>
     <p:spTree>
@@ -16944,7 +18240,7 @@
         <p:spPr>
           <a:xfrm>
             <a:off x="415636" y="4322741"/>
-            <a:ext cx="6096000" cy="923330"/>
+            <a:ext cx="6096000" cy="1015663"/>
           </a:xfrm>
           <a:prstGeom prst="rect">
             <a:avLst/>
@@ -16958,7 +18254,7 @@
           <a:lstStyle/>
           <a:p>
             <a:r>
-              <a:rPr lang="en-IN" sz="1800" b="1" dirty="0">
+              <a:rPr lang="en-IN" sz="2000" b="1" dirty="0">
                 <a:latin typeface="Times New Roman" panose="02020603050405020304" pitchFamily="18" charset="0"/>
                 <a:cs typeface="Times New Roman" panose="02020603050405020304" pitchFamily="18" charset="0"/>
               </a:rPr>
@@ -16967,11 +18263,11 @@
           </a:p>
           <a:p>
             <a:r>
-              <a:rPr lang="en-IN" sz="1800" dirty="0">
+              <a:rPr lang="en-IN" sz="2000" dirty="0">
                 <a:latin typeface="Times New Roman" panose="02020603050405020304" pitchFamily="18" charset="0"/>
                 <a:cs typeface="Times New Roman" panose="02020603050405020304" pitchFamily="18" charset="0"/>
               </a:rPr>
-              <a:t>Oil and Gas rich countries dominate the top position as average energy consumed per person is more</a:t>
+              <a:t>Oil and Gas rich countries dominate the top position as average energy consumed per person is more.</a:t>
             </a:r>
           </a:p>
         </p:txBody>
@@ -16989,7 +18285,7 @@
 </p:sld>
 </file>
 
-<file path=ppt/slides/slide17.xml><?xml version="1.0" encoding="utf-8"?>
+<file path=ppt/slides/slide18.xml><?xml version="1.0" encoding="utf-8"?>
 <p:sld xmlns:a="http://schemas.openxmlformats.org/drawingml/2006/main" xmlns:r="http://schemas.openxmlformats.org/officeDocument/2006/relationships" xmlns:p="http://schemas.openxmlformats.org/presentationml/2006/main">
   <p:cSld>
     <p:spTree>
@@ -17257,7 +18553,7 @@
         <p:spPr>
           <a:xfrm>
             <a:off x="415635" y="4417355"/>
-            <a:ext cx="6096000" cy="523220"/>
+            <a:ext cx="6096000" cy="1015663"/>
           </a:xfrm>
           <a:prstGeom prst="rect">
             <a:avLst/>
@@ -17271,7 +18567,7 @@
           <a:lstStyle/>
           <a:p>
             <a:r>
-              <a:rPr lang="en-IN" sz="1400" b="1" dirty="0">
+              <a:rPr lang="en-IN" sz="2000" b="1" dirty="0">
                 <a:latin typeface="Times New Roman" panose="02020603050405020304" pitchFamily="18" charset="0"/>
                 <a:cs typeface="Times New Roman" panose="02020603050405020304" pitchFamily="18" charset="0"/>
               </a:rPr>
@@ -17280,11 +18576,11 @@
           </a:p>
           <a:p>
             <a:r>
-              <a:rPr lang="en-IN" sz="1400" dirty="0">
+              <a:rPr lang="en-IN" sz="2000" dirty="0">
                 <a:latin typeface="Times New Roman" panose="02020603050405020304" pitchFamily="18" charset="0"/>
                 <a:cs typeface="Times New Roman" panose="02020603050405020304" pitchFamily="18" charset="0"/>
               </a:rPr>
-              <a:t>Qatar, Norway, Kuwait, UAE are energy- exporting/ producing countries.</a:t>
+              <a:t>Qatar, Norway, Kuwait, UAE are energy exporting/ producing countries.</a:t>
             </a:r>
           </a:p>
         </p:txBody>
@@ -17302,7 +18598,7 @@
 </p:sld>
 </file>
 
-<file path=ppt/slides/slide18.xml><?xml version="1.0" encoding="utf-8"?>
+<file path=ppt/slides/slide19.xml><?xml version="1.0" encoding="utf-8"?>
 <p:sld xmlns:a="http://schemas.openxmlformats.org/drawingml/2006/main" xmlns:r="http://schemas.openxmlformats.org/officeDocument/2006/relationships" xmlns:p="http://schemas.openxmlformats.org/presentationml/2006/main">
   <p:cSld>
     <p:spTree>
@@ -17570,7 +18866,7 @@
         <p:spPr>
           <a:xfrm>
             <a:off x="452582" y="4409369"/>
-            <a:ext cx="6705600" cy="923330"/>
+            <a:ext cx="6705600" cy="1015663"/>
           </a:xfrm>
           <a:prstGeom prst="rect">
             <a:avLst/>
@@ -17584,7 +18880,7 @@
           <a:lstStyle/>
           <a:p>
             <a:r>
-              <a:rPr lang="en-IN" sz="1800" b="1" dirty="0">
+              <a:rPr lang="en-IN" sz="2000" b="1" dirty="0">
                 <a:latin typeface="Times New Roman" panose="02020603050405020304" pitchFamily="18" charset="0"/>
                 <a:cs typeface="Times New Roman" panose="02020603050405020304" pitchFamily="18" charset="0"/>
               </a:rPr>
@@ -17593,21 +18889,21 @@
           </a:p>
           <a:p>
             <a:r>
-              <a:rPr lang="en-IN" sz="1800" dirty="0">
+              <a:rPr lang="en-IN" sz="2000" dirty="0">
                 <a:latin typeface="Times New Roman" panose="02020603050405020304" pitchFamily="18" charset="0"/>
                 <a:cs typeface="Times New Roman" panose="02020603050405020304" pitchFamily="18" charset="0"/>
               </a:rPr>
               <a:t>The countries with high consumption to </a:t>
             </a:r>
             <a:r>
-              <a:rPr lang="en-IN" sz="1800" dirty="0" err="1">
+              <a:rPr lang="en-IN" sz="2000" dirty="0" err="1">
                 <a:latin typeface="Times New Roman" panose="02020603050405020304" pitchFamily="18" charset="0"/>
                 <a:cs typeface="Times New Roman" panose="02020603050405020304" pitchFamily="18" charset="0"/>
               </a:rPr>
               <a:t>gdp</a:t>
             </a:r>
             <a:r>
-              <a:rPr lang="en-IN" sz="1800" dirty="0">
+              <a:rPr lang="en-IN" sz="2000" dirty="0">
                 <a:latin typeface="Times New Roman" panose="02020603050405020304" pitchFamily="18" charset="0"/>
                 <a:cs typeface="Times New Roman" panose="02020603050405020304" pitchFamily="18" charset="0"/>
               </a:rPr>
@@ -17629,7 +18925,148 @@
 </p:sld>
 </file>
 
-<file path=ppt/slides/slide19.xml><?xml version="1.0" encoding="utf-8"?>
+<file path=ppt/slides/slide2.xml><?xml version="1.0" encoding="utf-8"?>
+<p:sld xmlns:a="http://schemas.openxmlformats.org/drawingml/2006/main" xmlns:r="http://schemas.openxmlformats.org/officeDocument/2006/relationships" xmlns:p="http://schemas.openxmlformats.org/presentationml/2006/main">
+  <p:cSld>
+    <p:spTree>
+      <p:nvGrpSpPr>
+        <p:cNvPr id="1" name="Shape 97"/>
+        <p:cNvGrpSpPr/>
+        <p:nvPr/>
+      </p:nvGrpSpPr>
+      <p:grpSpPr>
+        <a:xfrm>
+          <a:off x="0" y="0"/>
+          <a:ext cx="0" cy="0"/>
+          <a:chOff x="0" y="0"/>
+          <a:chExt cx="0" cy="0"/>
+        </a:xfrm>
+      </p:grpSpPr>
+      <p:pic>
+        <p:nvPicPr>
+          <p:cNvPr id="98" name="Google Shape;98;p1"/>
+          <p:cNvPicPr preferRelativeResize="0"/>
+          <p:nvPr/>
+        </p:nvPicPr>
+        <p:blipFill rotWithShape="1">
+          <a:blip r:embed="rId3">
+            <a:alphaModFix/>
+          </a:blip>
+          <a:srcRect/>
+          <a:stretch/>
+        </p:blipFill>
+        <p:spPr>
+          <a:xfrm>
+            <a:off x="0" y="81951"/>
+            <a:ext cx="12190815" cy="6694098"/>
+          </a:xfrm>
+          <a:prstGeom prst="rect">
+            <a:avLst/>
+          </a:prstGeom>
+          <a:noFill/>
+          <a:ln>
+            <a:noFill/>
+          </a:ln>
+        </p:spPr>
+      </p:pic>
+      <p:sp>
+        <p:nvSpPr>
+          <p:cNvPr id="99" name="Google Shape;99;p1"/>
+          <p:cNvSpPr txBox="1"/>
+          <p:nvPr/>
+        </p:nvSpPr>
+        <p:spPr>
+          <a:xfrm>
+            <a:off x="2198584" y="3881888"/>
+            <a:ext cx="7246189" cy="1200288"/>
+          </a:xfrm>
+          <a:prstGeom prst="rect">
+            <a:avLst/>
+          </a:prstGeom>
+          <a:noFill/>
+          <a:ln>
+            <a:noFill/>
+          </a:ln>
+        </p:spPr>
+        <p:txBody>
+          <a:bodyPr spcFirstLastPara="1" wrap="square" lIns="91425" tIns="45700" rIns="91425" bIns="45700" anchor="t" anchorCtr="0">
+            <a:spAutoFit/>
+          </a:bodyPr>
+          <a:lstStyle/>
+          <a:p>
+            <a:pPr lvl="0" algn="ctr">
+              <a:buSzPts val="1800"/>
+            </a:pPr>
+            <a:r>
+              <a:rPr lang="en-GB" sz="3600" b="1" dirty="0">
+                <a:latin typeface="Times New Roman" panose="02020603050405020304" pitchFamily="18" charset="0"/>
+                <a:cs typeface="Times New Roman" panose="02020603050405020304" pitchFamily="18" charset="0"/>
+              </a:rPr>
+              <a:t>World Wide Energy Consumption Analysis Using MySQL</a:t>
+            </a:r>
+            <a:endParaRPr sz="3600" b="0" i="0" strike="noStrike" cap="none" dirty="0">
+              <a:solidFill>
+                <a:srgbClr val="000000"/>
+              </a:solidFill>
+              <a:latin typeface="Times New Roman" panose="02020603050405020304" pitchFamily="18" charset="0"/>
+              <a:cs typeface="Times New Roman" panose="02020603050405020304" pitchFamily="18" charset="0"/>
+              <a:sym typeface="Arial"/>
+            </a:endParaRPr>
+          </a:p>
+        </p:txBody>
+      </p:sp>
+      <p:sp>
+        <p:nvSpPr>
+          <p:cNvPr id="2" name="TextBox 1">
+            <a:extLst>
+              <a:ext uri="{FF2B5EF4-FFF2-40B4-BE49-F238E27FC236}">
+                <a16:creationId xmlns:a16="http://schemas.microsoft.com/office/drawing/2014/main" id="{52D775B4-4629-C68F-7C65-947ED7265480}"/>
+              </a:ext>
+            </a:extLst>
+          </p:cNvPr>
+          <p:cNvSpPr txBox="1"/>
+          <p:nvPr/>
+        </p:nvSpPr>
+        <p:spPr>
+          <a:xfrm>
+            <a:off x="4169664" y="5248656"/>
+            <a:ext cx="3200400" cy="461665"/>
+          </a:xfrm>
+          <a:prstGeom prst="rect">
+            <a:avLst/>
+          </a:prstGeom>
+          <a:noFill/>
+        </p:spPr>
+        <p:txBody>
+          <a:bodyPr wrap="square" rtlCol="0">
+            <a:spAutoFit/>
+          </a:bodyPr>
+          <a:lstStyle/>
+          <a:p>
+            <a:pPr algn="ctr"/>
+            <a:r>
+              <a:rPr lang="en-IN" sz="2400" b="1" dirty="0">
+                <a:latin typeface="Times New Roman" panose="02020603050405020304" pitchFamily="18" charset="0"/>
+                <a:cs typeface="Times New Roman" panose="02020603050405020304" pitchFamily="18" charset="0"/>
+              </a:rPr>
+              <a:t>Shivani Gundla</a:t>
+            </a:r>
+            <a:endParaRPr lang="en-GB" sz="2400" b="1" dirty="0">
+              <a:latin typeface="Times New Roman" panose="02020603050405020304" pitchFamily="18" charset="0"/>
+              <a:cs typeface="Times New Roman" panose="02020603050405020304" pitchFamily="18" charset="0"/>
+            </a:endParaRPr>
+          </a:p>
+        </p:txBody>
+      </p:sp>
+    </p:spTree>
+  </p:cSld>
+  <p:clrMapOvr>
+    <a:masterClrMapping/>
+  </p:clrMapOvr>
+</p:sld>
+</file>
+
+<file path=ppt/slides/slide20.xml><?xml version="1.0" encoding="utf-8"?>
 <p:sld xmlns:a="http://schemas.openxmlformats.org/drawingml/2006/main" xmlns:r="http://schemas.openxmlformats.org/officeDocument/2006/relationships" xmlns:p="http://schemas.openxmlformats.org/presentationml/2006/main">
   <p:cSld>
     <p:spTree>
@@ -18208,8 +19645,8 @@
         </p:nvSpPr>
         <p:spPr>
           <a:xfrm>
-            <a:off x="332511" y="4759461"/>
-            <a:ext cx="5992198" cy="923330"/>
+            <a:off x="408398" y="4415061"/>
+            <a:ext cx="5992198" cy="1015663"/>
           </a:xfrm>
           <a:prstGeom prst="rect">
             <a:avLst/>
@@ -18223,7 +19660,7 @@
           <a:lstStyle/>
           <a:p>
             <a:r>
-              <a:rPr lang="en-IN" sz="1800" b="1" dirty="0">
+              <a:rPr lang="en-IN" sz="2000" b="1" dirty="0">
                 <a:latin typeface="Times New Roman" panose="02020603050405020304" pitchFamily="18" charset="0"/>
                 <a:cs typeface="Times New Roman" panose="02020603050405020304" pitchFamily="18" charset="0"/>
               </a:rPr>
@@ -18232,11 +19669,11 @@
           </a:p>
           <a:p>
             <a:r>
-              <a:rPr lang="en-IN" sz="1800" dirty="0">
+              <a:rPr lang="en-IN" sz="2000" dirty="0">
                 <a:latin typeface="Times New Roman" panose="02020603050405020304" pitchFamily="18" charset="0"/>
                 <a:cs typeface="Times New Roman" panose="02020603050405020304" pitchFamily="18" charset="0"/>
               </a:rPr>
-              <a:t>Countries with high average population are producing much emissions</a:t>
+              <a:t>Countries with high average population are producing much emissions.</a:t>
             </a:r>
           </a:p>
         </p:txBody>
@@ -18254,405 +19691,7 @@
 </p:sld>
 </file>
 
-<file path=ppt/slides/slide2.xml><?xml version="1.0" encoding="utf-8"?>
-<p:sld xmlns:a="http://schemas.openxmlformats.org/drawingml/2006/main" xmlns:r="http://schemas.openxmlformats.org/officeDocument/2006/relationships" xmlns:p="http://schemas.openxmlformats.org/presentationml/2006/main">
-  <p:cSld>
-    <p:spTree>
-      <p:nvGrpSpPr>
-        <p:cNvPr id="1" name="Shape 103"/>
-        <p:cNvGrpSpPr/>
-        <p:nvPr/>
-      </p:nvGrpSpPr>
-      <p:grpSpPr>
-        <a:xfrm>
-          <a:off x="0" y="0"/>
-          <a:ext cx="0" cy="0"/>
-          <a:chOff x="0" y="0"/>
-          <a:chExt cx="0" cy="0"/>
-        </a:xfrm>
-      </p:grpSpPr>
-      <p:sp>
-        <p:nvSpPr>
-          <p:cNvPr id="104" name="Google Shape;104;p3"/>
-          <p:cNvSpPr txBox="1"/>
-          <p:nvPr/>
-        </p:nvSpPr>
-        <p:spPr>
-          <a:xfrm>
-            <a:off x="1024138" y="1391536"/>
-            <a:ext cx="10059497" cy="3108503"/>
-          </a:xfrm>
-          <a:prstGeom prst="rect">
-            <a:avLst/>
-          </a:prstGeom>
-          <a:noFill/>
-          <a:ln>
-            <a:noFill/>
-          </a:ln>
-        </p:spPr>
-        <p:txBody>
-          <a:bodyPr spcFirstLastPara="1" wrap="square" lIns="91425" tIns="45700" rIns="91425" bIns="45700" anchor="t" anchorCtr="0">
-            <a:spAutoFit/>
-          </a:bodyPr>
-          <a:lstStyle/>
-          <a:p>
-            <a:pPr marL="285750" marR="0" lvl="0" indent="-323850" algn="l" rtl="0">
-              <a:lnSpc>
-                <a:spcPct val="100000"/>
-              </a:lnSpc>
-              <a:spcBef>
-                <a:spcPts val="0"/>
-              </a:spcBef>
-              <a:spcAft>
-                <a:spcPts val="0"/>
-              </a:spcAft>
-              <a:buClr>
-                <a:schemeClr val="dk1"/>
-              </a:buClr>
-              <a:buSzPts val="2400"/>
-              <a:buFont typeface="Arial"/>
-              <a:buChar char="•"/>
-            </a:pPr>
-            <a:r>
-              <a:rPr lang="en-IN" sz="2800" b="1" i="0" u="none" strike="noStrike" cap="none" dirty="0">
-                <a:solidFill>
-                  <a:srgbClr val="FF0000"/>
-                </a:solidFill>
-                <a:latin typeface="Calibri"/>
-                <a:ea typeface="Calibri"/>
-                <a:cs typeface="Calibri"/>
-                <a:sym typeface="Calibri"/>
-              </a:rPr>
-              <a:t>Background</a:t>
-            </a:r>
-            <a:r>
-              <a:rPr lang="en-IN" sz="2800" b="1" dirty="0">
-                <a:solidFill>
-                  <a:srgbClr val="FF0000"/>
-                </a:solidFill>
-                <a:latin typeface="Calibri"/>
-                <a:ea typeface="Calibri"/>
-                <a:cs typeface="Calibri"/>
-                <a:sym typeface="Calibri"/>
-              </a:rPr>
-              <a:t>: </a:t>
-            </a:r>
-            <a:r>
-              <a:rPr lang="en-IN" sz="2800" b="1" dirty="0">
-                <a:solidFill>
-                  <a:schemeClr val="tx1"/>
-                </a:solidFill>
-                <a:latin typeface="Calibri"/>
-                <a:ea typeface="Calibri"/>
-                <a:cs typeface="Calibri"/>
-                <a:sym typeface="Calibri"/>
-              </a:rPr>
-              <a:t>MSc in Satellite Data Science</a:t>
-            </a:r>
-          </a:p>
-          <a:p>
-            <a:pPr marL="285750" marR="0" lvl="0" indent="-323850" algn="l" rtl="0">
-              <a:lnSpc>
-                <a:spcPct val="100000"/>
-              </a:lnSpc>
-              <a:spcBef>
-                <a:spcPts val="0"/>
-              </a:spcBef>
-              <a:spcAft>
-                <a:spcPts val="0"/>
-              </a:spcAft>
-              <a:buClr>
-                <a:schemeClr val="dk1"/>
-              </a:buClr>
-              <a:buSzPts val="2400"/>
-              <a:buFont typeface="Arial"/>
-              <a:buChar char="•"/>
-            </a:pPr>
-            <a:endParaRPr lang="en-IN" sz="2800" b="1" i="0" u="none" strike="noStrike" cap="none" dirty="0">
-              <a:solidFill>
-                <a:srgbClr val="FF0000"/>
-              </a:solidFill>
-              <a:latin typeface="Calibri"/>
-              <a:ea typeface="Calibri"/>
-              <a:cs typeface="Calibri"/>
-              <a:sym typeface="Calibri"/>
-            </a:endParaRPr>
-          </a:p>
-          <a:p>
-            <a:pPr marL="285750" marR="0" lvl="0" indent="-323850" algn="l" rtl="0">
-              <a:lnSpc>
-                <a:spcPct val="100000"/>
-              </a:lnSpc>
-              <a:spcBef>
-                <a:spcPts val="0"/>
-              </a:spcBef>
-              <a:spcAft>
-                <a:spcPts val="0"/>
-              </a:spcAft>
-              <a:buClr>
-                <a:schemeClr val="dk1"/>
-              </a:buClr>
-              <a:buSzPts val="2400"/>
-              <a:buFont typeface="Arial"/>
-              <a:buChar char="•"/>
-            </a:pPr>
-            <a:r>
-              <a:rPr lang="en-IN" sz="2800" b="1" i="0" u="none" strike="noStrike" cap="none" dirty="0">
-                <a:solidFill>
-                  <a:srgbClr val="FF0000"/>
-                </a:solidFill>
-                <a:latin typeface="Calibri"/>
-                <a:ea typeface="Calibri"/>
-                <a:cs typeface="Calibri"/>
-                <a:sym typeface="Calibri"/>
-              </a:rPr>
-              <a:t>Why you want to learn Data Science</a:t>
-            </a:r>
-            <a:r>
-              <a:rPr lang="en-IN" sz="2800" b="1" dirty="0">
-                <a:solidFill>
-                  <a:srgbClr val="FF0000"/>
-                </a:solidFill>
-                <a:latin typeface="Calibri"/>
-                <a:ea typeface="Calibri"/>
-                <a:cs typeface="Calibri"/>
-                <a:sym typeface="Calibri"/>
-              </a:rPr>
-              <a:t>?</a:t>
-            </a:r>
-          </a:p>
-          <a:p>
-            <a:pPr marL="304800" marR="0" lvl="0" indent="-342900" algn="l" rtl="0">
-              <a:lnSpc>
-                <a:spcPct val="100000"/>
-              </a:lnSpc>
-              <a:spcBef>
-                <a:spcPts val="0"/>
-              </a:spcBef>
-              <a:spcAft>
-                <a:spcPts val="0"/>
-              </a:spcAft>
-              <a:buClr>
-                <a:schemeClr val="dk1"/>
-              </a:buClr>
-              <a:buSzPts val="2400"/>
-              <a:buFont typeface="Arial" panose="020B0604020202020204" pitchFamily="34" charset="0"/>
-              <a:buChar char="•"/>
-            </a:pPr>
-            <a:endParaRPr sz="2800" b="1" i="0" u="none" strike="noStrike" cap="none" dirty="0">
-              <a:solidFill>
-                <a:srgbClr val="FF0000"/>
-              </a:solidFill>
-              <a:latin typeface="Calibri"/>
-              <a:ea typeface="Calibri"/>
-              <a:cs typeface="Calibri"/>
-              <a:sym typeface="Calibri"/>
-            </a:endParaRPr>
-          </a:p>
-          <a:p>
-            <a:pPr marL="342900" lvl="0" indent="-342900">
-              <a:buClr>
-                <a:schemeClr val="dk1"/>
-              </a:buClr>
-              <a:buSzPts val="2400"/>
-              <a:buFont typeface="Arial" panose="020B0604020202020204" pitchFamily="34" charset="0"/>
-              <a:buChar char="•"/>
-            </a:pPr>
-            <a:r>
-              <a:rPr lang="en-IN" sz="2800" b="1" dirty="0">
-                <a:solidFill>
-                  <a:srgbClr val="FF0000"/>
-                </a:solidFill>
-                <a:latin typeface="Calibri"/>
-                <a:ea typeface="Calibri"/>
-                <a:cs typeface="Calibri"/>
-                <a:sym typeface="Calibri"/>
-              </a:rPr>
-              <a:t>LinkedIn</a:t>
-            </a:r>
-            <a:r>
-              <a:rPr lang="en-IN" sz="2800" b="1" i="0" u="none" strike="noStrike" cap="none" dirty="0">
-                <a:solidFill>
-                  <a:srgbClr val="FF0000"/>
-                </a:solidFill>
-                <a:latin typeface="Calibri"/>
-                <a:ea typeface="Calibri"/>
-                <a:cs typeface="Calibri"/>
-                <a:sym typeface="Calibri"/>
-              </a:rPr>
-              <a:t> </a:t>
-            </a:r>
-            <a:r>
-              <a:rPr lang="en-IN" sz="2800" b="1" dirty="0">
-                <a:solidFill>
-                  <a:srgbClr val="FF0000"/>
-                </a:solidFill>
-                <a:latin typeface="Calibri"/>
-                <a:ea typeface="Calibri"/>
-                <a:cs typeface="Calibri"/>
-                <a:sym typeface="Calibri"/>
-              </a:rPr>
-              <a:t>profile URL: </a:t>
-            </a:r>
-            <a:r>
-              <a:rPr lang="en-IN" sz="2800" b="1" dirty="0">
-                <a:solidFill>
-                  <a:srgbClr val="FF0000"/>
-                </a:solidFill>
-                <a:latin typeface="Calibri"/>
-                <a:ea typeface="Calibri"/>
-                <a:cs typeface="Calibri"/>
-                <a:sym typeface="Calibri"/>
-                <a:hlinkClick r:id="rId3"/>
-              </a:rPr>
-              <a:t>www.linkedin.com/in/shivanigundla29</a:t>
-            </a:r>
-            <a:endParaRPr lang="en-IN" sz="2800" b="1" dirty="0">
-              <a:solidFill>
-                <a:srgbClr val="FF0000"/>
-              </a:solidFill>
-              <a:latin typeface="Calibri"/>
-              <a:ea typeface="Calibri"/>
-              <a:cs typeface="Calibri"/>
-              <a:sym typeface="Calibri"/>
-            </a:endParaRPr>
-          </a:p>
-          <a:p>
-            <a:pPr lvl="0">
-              <a:buClr>
-                <a:schemeClr val="dk1"/>
-              </a:buClr>
-              <a:buSzPts val="2400"/>
-            </a:pPr>
-            <a:endParaRPr lang="en-IN" sz="2800" b="1" dirty="0">
-              <a:solidFill>
-                <a:srgbClr val="FF0000"/>
-              </a:solidFill>
-              <a:latin typeface="Calibri"/>
-              <a:ea typeface="Calibri"/>
-              <a:cs typeface="Calibri"/>
-              <a:sym typeface="Calibri"/>
-            </a:endParaRPr>
-          </a:p>
-          <a:p>
-            <a:pPr marL="342900" lvl="0" indent="-342900">
-              <a:buClr>
-                <a:schemeClr val="dk1"/>
-              </a:buClr>
-              <a:buSzPts val="2400"/>
-              <a:buFont typeface="Arial" panose="020B0604020202020204" pitchFamily="34" charset="0"/>
-              <a:buChar char="•"/>
-            </a:pPr>
-            <a:r>
-              <a:rPr lang="en-IN" sz="2800" b="1" dirty="0">
-                <a:solidFill>
-                  <a:srgbClr val="FF0000"/>
-                </a:solidFill>
-                <a:latin typeface="Calibri"/>
-                <a:ea typeface="Calibri"/>
-                <a:cs typeface="Calibri"/>
-                <a:sym typeface="Calibri"/>
-              </a:rPr>
-              <a:t>GitHub</a:t>
-            </a:r>
-            <a:r>
-              <a:rPr lang="en-IN" sz="2800" b="1" i="0" u="none" strike="noStrike" cap="none" dirty="0">
-                <a:solidFill>
-                  <a:srgbClr val="FF0000"/>
-                </a:solidFill>
-                <a:latin typeface="Calibri"/>
-                <a:ea typeface="Calibri"/>
-                <a:cs typeface="Calibri"/>
-                <a:sym typeface="Calibri"/>
-              </a:rPr>
-              <a:t> profile </a:t>
-            </a:r>
-            <a:r>
-              <a:rPr lang="en-IN" sz="2800" b="1" dirty="0">
-                <a:solidFill>
-                  <a:srgbClr val="FF0000"/>
-                </a:solidFill>
-                <a:latin typeface="Calibri"/>
-                <a:ea typeface="Calibri"/>
-                <a:cs typeface="Calibri"/>
-                <a:sym typeface="Calibri"/>
-              </a:rPr>
-              <a:t>URL: </a:t>
-            </a:r>
-            <a:r>
-              <a:rPr lang="en-IN" sz="2800" b="1" dirty="0">
-                <a:solidFill>
-                  <a:srgbClr val="FF0000"/>
-                </a:solidFill>
-                <a:latin typeface="Calibri"/>
-                <a:ea typeface="Calibri"/>
-                <a:cs typeface="Calibri"/>
-                <a:sym typeface="Calibri"/>
-                <a:hlinkClick r:id="rId4"/>
-              </a:rPr>
-              <a:t>https://github.com/ShivaniGundla</a:t>
-            </a:r>
-            <a:endParaRPr sz="2800" b="1" i="0" u="none" strike="noStrike" cap="none" dirty="0">
-              <a:solidFill>
-                <a:srgbClr val="FF0000"/>
-              </a:solidFill>
-              <a:latin typeface="Calibri"/>
-              <a:ea typeface="Calibri"/>
-              <a:cs typeface="Calibri"/>
-              <a:sym typeface="Calibri"/>
-            </a:endParaRPr>
-          </a:p>
-        </p:txBody>
-      </p:sp>
-      <p:sp>
-        <p:nvSpPr>
-          <p:cNvPr id="3" name="TextBox 2">
-            <a:extLst>
-              <a:ext uri="{FF2B5EF4-FFF2-40B4-BE49-F238E27FC236}">
-                <a16:creationId xmlns:a16="http://schemas.microsoft.com/office/drawing/2014/main" id="{3326C643-06CE-A090-79BB-A53594EF3831}"/>
-              </a:ext>
-            </a:extLst>
-          </p:cNvPr>
-          <p:cNvSpPr txBox="1"/>
-          <p:nvPr/>
-        </p:nvSpPr>
-        <p:spPr>
-          <a:xfrm>
-            <a:off x="905163" y="608112"/>
-            <a:ext cx="6096000" cy="707886"/>
-          </a:xfrm>
-          <a:prstGeom prst="rect">
-            <a:avLst/>
-          </a:prstGeom>
-          <a:noFill/>
-        </p:spPr>
-        <p:txBody>
-          <a:bodyPr wrap="square">
-            <a:spAutoFit/>
-          </a:bodyPr>
-          <a:lstStyle/>
-          <a:p>
-            <a:r>
-              <a:rPr lang="en-IN" sz="4000" b="1" dirty="0">
-                <a:solidFill>
-                  <a:srgbClr val="FF0000"/>
-                </a:solidFill>
-              </a:rPr>
-              <a:t>About Me </a:t>
-            </a:r>
-            <a:endParaRPr lang="en-GB" sz="4000" dirty="0"/>
-          </a:p>
-        </p:txBody>
-      </p:sp>
-    </p:spTree>
-  </p:cSld>
-  <p:clrMapOvr>
-    <a:masterClrMapping/>
-  </p:clrMapOvr>
-</p:sld>
-</file>
-
-<file path=ppt/slides/slide20.xml><?xml version="1.0" encoding="utf-8"?>
+<file path=ppt/slides/slide21.xml><?xml version="1.0" encoding="utf-8"?>
 <p:sld xmlns:a="http://schemas.openxmlformats.org/drawingml/2006/main" xmlns:r="http://schemas.openxmlformats.org/officeDocument/2006/relationships" xmlns:p="http://schemas.openxmlformats.org/presentationml/2006/main">
   <p:cSld>
     <p:spTree>
@@ -18930,7 +19969,7 @@
         <p:spPr>
           <a:xfrm>
             <a:off x="292132" y="4260914"/>
-            <a:ext cx="6696364" cy="923330"/>
+            <a:ext cx="6696364" cy="1015663"/>
           </a:xfrm>
           <a:prstGeom prst="rect">
             <a:avLst/>
@@ -18944,7 +19983,7 @@
           <a:lstStyle/>
           <a:p>
             <a:r>
-              <a:rPr lang="en-IN" sz="1800" b="1" dirty="0">
+              <a:rPr lang="en-IN" sz="2000" b="1" dirty="0">
                 <a:latin typeface="Times New Roman" panose="02020603050405020304" pitchFamily="18" charset="0"/>
                 <a:cs typeface="Times New Roman" panose="02020603050405020304" pitchFamily="18" charset="0"/>
               </a:rPr>
@@ -18953,13 +19992,13 @@
           </a:p>
           <a:p>
             <a:r>
-              <a:rPr lang="en-IN" sz="1800" dirty="0">
+              <a:rPr lang="en-IN" sz="2000" dirty="0">
                 <a:latin typeface="Times New Roman" panose="02020603050405020304" pitchFamily="18" charset="0"/>
                 <a:cs typeface="Times New Roman" panose="02020603050405020304" pitchFamily="18" charset="0"/>
               </a:rPr>
               <a:t>China is the top most contributor in the world as it accounts to 32.3% to total global emissions.</a:t>
             </a:r>
-            <a:endParaRPr lang="en-GB" sz="1800" dirty="0">
+            <a:endParaRPr lang="en-GB" sz="2000" dirty="0">
               <a:latin typeface="Times New Roman" panose="02020603050405020304" pitchFamily="18" charset="0"/>
               <a:cs typeface="Times New Roman" panose="02020603050405020304" pitchFamily="18" charset="0"/>
             </a:endParaRPr>
@@ -18979,7 +20018,7 @@
 </p:sld>
 </file>
 
-<file path=ppt/slides/slide21.xml><?xml version="1.0" encoding="utf-8"?>
+<file path=ppt/slides/slide22.xml><?xml version="1.0" encoding="utf-8"?>
 <p:sld xmlns:a="http://schemas.openxmlformats.org/drawingml/2006/main" xmlns:r="http://schemas.openxmlformats.org/officeDocument/2006/relationships" xmlns:p="http://schemas.openxmlformats.org/presentationml/2006/main">
   <p:cSld>
     <p:spTree>
@@ -19247,7 +20286,7 @@
         <p:spPr>
           <a:xfrm>
             <a:off x="815890" y="5068880"/>
-            <a:ext cx="10335490" cy="923330"/>
+            <a:ext cx="10917236" cy="1015663"/>
           </a:xfrm>
           <a:prstGeom prst="rect">
             <a:avLst/>
@@ -19261,7 +20300,7 @@
           <a:lstStyle/>
           <a:p>
             <a:r>
-              <a:rPr lang="en-IN" sz="1800" b="1" dirty="0">
+              <a:rPr lang="en-IN" sz="2000" b="1" dirty="0">
                 <a:latin typeface="Times New Roman" panose="02020603050405020304" pitchFamily="18" charset="0"/>
                 <a:cs typeface="Times New Roman" panose="02020603050405020304" pitchFamily="18" charset="0"/>
               </a:rPr>
@@ -19270,19 +20309,19 @@
           </a:p>
           <a:p>
             <a:r>
-              <a:rPr lang="en-US" sz="1800" dirty="0">
+              <a:rPr lang="en-US" sz="2000" dirty="0">
                 <a:latin typeface="Times New Roman" panose="02020603050405020304" pitchFamily="18" charset="0"/>
                 <a:cs typeface="Times New Roman" panose="02020603050405020304" pitchFamily="18" charset="0"/>
               </a:rPr>
               <a:t>Population Growth → Economic Growth (GDP)→Higher Energy Consumption →Higher Emissions</a:t>
             </a:r>
-            <a:endParaRPr lang="en-IN" sz="1800" b="1" dirty="0">
+            <a:endParaRPr lang="en-IN" sz="2000" b="1" dirty="0">
               <a:latin typeface="Times New Roman" panose="02020603050405020304" pitchFamily="18" charset="0"/>
               <a:cs typeface="Times New Roman" panose="02020603050405020304" pitchFamily="18" charset="0"/>
             </a:endParaRPr>
           </a:p>
           <a:p>
-            <a:endParaRPr lang="en-IN" sz="1800" b="1" dirty="0">
+            <a:endParaRPr lang="en-IN" sz="2000" b="1" dirty="0">
               <a:latin typeface="Times New Roman" panose="02020603050405020304" pitchFamily="18" charset="0"/>
               <a:cs typeface="Times New Roman" panose="02020603050405020304" pitchFamily="18" charset="0"/>
             </a:endParaRPr>
@@ -19302,7 +20341,7 @@
 </p:sld>
 </file>
 
-<file path=ppt/slides/slide22.xml><?xml version="1.0" encoding="utf-8"?>
+<file path=ppt/slides/slide23.xml><?xml version="1.0" encoding="utf-8"?>
 <p:sld xmlns:a="http://schemas.openxmlformats.org/drawingml/2006/main" xmlns:r="http://schemas.openxmlformats.org/officeDocument/2006/relationships" xmlns:p="http://schemas.openxmlformats.org/presentationml/2006/main">
   <p:cSld>
     <p:spTree>
@@ -19393,7 +20432,10 @@
               <a:buChar char="v"/>
             </a:pPr>
             <a:r>
-              <a:rPr lang="en-US" sz="2000" dirty="0"/>
+              <a:rPr lang="en-US" sz="2000" dirty="0">
+                <a:latin typeface="Times New Roman" panose="02020603050405020304" pitchFamily="18" charset="0"/>
+                <a:cs typeface="Times New Roman" panose="02020603050405020304" pitchFamily="18" charset="0"/>
+              </a:rPr>
               <a:t>Fossil-fuel-rich countries dominated energy production per capita, indicating strong dependence on oil and gas industries.</a:t>
             </a:r>
           </a:p>
@@ -19403,7 +20445,10 @@
               <a:buChar char="v"/>
             </a:pPr>
             <a:r>
-              <a:rPr lang="en-US" sz="2000" dirty="0"/>
+              <a:rPr lang="en-US" sz="2000" dirty="0">
+                <a:latin typeface="Times New Roman" panose="02020603050405020304" pitchFamily="18" charset="0"/>
+                <a:cs typeface="Times New Roman" panose="02020603050405020304" pitchFamily="18" charset="0"/>
+              </a:rPr>
               <a:t>Developed and industrialized countries showed the highest energy consumption per capita, reflecting energy-intensive lifestyles and infrastructure</a:t>
             </a:r>
           </a:p>
@@ -19413,7 +20458,10 @@
               <a:buChar char="v"/>
             </a:pPr>
             <a:r>
-              <a:rPr lang="en-US" sz="2000" dirty="0"/>
+              <a:rPr lang="en-US" sz="2000" dirty="0">
+                <a:latin typeface="Times New Roman" panose="02020603050405020304" pitchFamily="18" charset="0"/>
+                <a:cs typeface="Times New Roman" panose="02020603050405020304" pitchFamily="18" charset="0"/>
+              </a:rPr>
               <a:t>Population growth contributes significantly to rising energy demand, urbanization, and environmental pressure.</a:t>
             </a:r>
           </a:p>
@@ -19423,7 +20471,10 @@
               <a:buChar char="v"/>
             </a:pPr>
             <a:r>
-              <a:rPr lang="en-US" sz="2000" dirty="0"/>
+              <a:rPr lang="en-US" sz="2000" dirty="0">
+                <a:latin typeface="Times New Roman" panose="02020603050405020304" pitchFamily="18" charset="0"/>
+                <a:cs typeface="Times New Roman" panose="02020603050405020304" pitchFamily="18" charset="0"/>
+              </a:rPr>
               <a:t>Countries with higher economic activity generally exhibited higher energy consumption and greenhouse gas emissions</a:t>
             </a:r>
           </a:p>
@@ -19433,7 +20484,10 @@
               <a:buChar char="v"/>
             </a:pPr>
             <a:r>
-              <a:rPr lang="en-US" sz="2000" dirty="0"/>
+              <a:rPr lang="en-US" sz="2000" dirty="0">
+                <a:latin typeface="Times New Roman" panose="02020603050405020304" pitchFamily="18" charset="0"/>
+                <a:cs typeface="Times New Roman" panose="02020603050405020304" pitchFamily="18" charset="0"/>
+              </a:rPr>
               <a:t>Global GDP, population, and emissions showed an increasing trend over recent years especially in 2023, highlighting continued economic and industrial expansion.</a:t>
             </a:r>
             <a:endParaRPr lang="en-GB" sz="2000" b="1" dirty="0">
@@ -19452,144 +20506,6 @@
         <p14:creationId xmlns:p14="http://schemas.microsoft.com/office/powerpoint/2010/main" val="737454223"/>
       </p:ext>
     </p:extLst>
-  </p:cSld>
-  <p:clrMapOvr>
-    <a:masterClrMapping/>
-  </p:clrMapOvr>
-</p:sld>
-</file>
-
-<file path=ppt/slides/slide23.xml><?xml version="1.0" encoding="utf-8"?>
-<p:sld xmlns:a="http://schemas.openxmlformats.org/drawingml/2006/main" xmlns:r="http://schemas.openxmlformats.org/officeDocument/2006/relationships" xmlns:p="http://schemas.openxmlformats.org/presentationml/2006/main">
-  <p:cSld>
-    <p:spTree>
-      <p:nvGrpSpPr>
-        <p:cNvPr id="1" name="Shape 115"/>
-        <p:cNvGrpSpPr/>
-        <p:nvPr/>
-      </p:nvGrpSpPr>
-      <p:grpSpPr>
-        <a:xfrm>
-          <a:off x="0" y="0"/>
-          <a:ext cx="0" cy="0"/>
-          <a:chOff x="0" y="0"/>
-          <a:chExt cx="0" cy="0"/>
-        </a:xfrm>
-      </p:grpSpPr>
-      <p:sp>
-        <p:nvSpPr>
-          <p:cNvPr id="117" name="Google Shape;117;p5"/>
-          <p:cNvSpPr txBox="1"/>
-          <p:nvPr/>
-        </p:nvSpPr>
-        <p:spPr>
-          <a:xfrm>
-            <a:off x="2750128" y="1380836"/>
-            <a:ext cx="6837218" cy="2969491"/>
-          </a:xfrm>
-          <a:prstGeom prst="rect">
-            <a:avLst/>
-          </a:prstGeom>
-          <a:noFill/>
-          <a:ln>
-            <a:noFill/>
-          </a:ln>
-        </p:spPr>
-        <p:txBody>
-          <a:bodyPr spcFirstLastPara="1" wrap="square" lIns="91425" tIns="45700" rIns="91425" bIns="45700" anchor="t" anchorCtr="0">
-            <a:noAutofit/>
-          </a:bodyPr>
-          <a:lstStyle/>
-          <a:p>
-            <a:pPr marL="0" marR="0" lvl="0" indent="0" algn="l" rtl="0">
-              <a:lnSpc>
-                <a:spcPct val="100000"/>
-              </a:lnSpc>
-              <a:spcBef>
-                <a:spcPts val="0"/>
-              </a:spcBef>
-              <a:spcAft>
-                <a:spcPts val="0"/>
-              </a:spcAft>
-              <a:buClr>
-                <a:srgbClr val="C00000"/>
-              </a:buClr>
-              <a:buSzPts val="4400"/>
-              <a:buFont typeface="Libre Baskerville"/>
-              <a:buNone/>
-            </a:pPr>
-            <a:r>
-              <a:rPr lang="en-IN" sz="20000" dirty="0">
-                <a:solidFill>
-                  <a:srgbClr val="FF0000"/>
-                </a:solidFill>
-                <a:latin typeface="Calibri"/>
-                <a:ea typeface="Calibri"/>
-                <a:cs typeface="Calibri"/>
-                <a:sym typeface="Calibri"/>
-              </a:rPr>
-              <a:t>Q&amp;A</a:t>
-            </a:r>
-            <a:endParaRPr sz="20000" b="0" i="0" u="none" strike="noStrike" cap="none" dirty="0">
-              <a:solidFill>
-                <a:srgbClr val="FF0000"/>
-              </a:solidFill>
-              <a:latin typeface="Calibri"/>
-              <a:ea typeface="Calibri"/>
-              <a:cs typeface="Calibri"/>
-              <a:sym typeface="Calibri"/>
-            </a:endParaRPr>
-          </a:p>
-        </p:txBody>
-      </p:sp>
-      <p:pic>
-        <p:nvPicPr>
-          <p:cNvPr id="1026" name="Picture 2">
-            <a:extLst>
-              <a:ext uri="{FF2B5EF4-FFF2-40B4-BE49-F238E27FC236}">
-                <a16:creationId xmlns:a16="http://schemas.microsoft.com/office/drawing/2014/main" id="{AF96F5EF-197A-F664-E59D-B0EB858399F6}"/>
-              </a:ext>
-            </a:extLst>
-          </p:cNvPr>
-          <p:cNvPicPr>
-            <a:picLocks noChangeAspect="1" noChangeArrowheads="1"/>
-          </p:cNvPicPr>
-          <p:nvPr/>
-        </p:nvPicPr>
-        <p:blipFill>
-          <a:blip r:embed="rId3">
-            <a:extLst>
-              <a:ext uri="{28A0092B-C50C-407E-A947-70E740481C1C}">
-                <a14:useLocalDpi xmlns:a14="http://schemas.microsoft.com/office/drawing/2010/main" val="0"/>
-              </a:ext>
-            </a:extLst>
-          </a:blip>
-          <a:srcRect/>
-          <a:stretch>
-            <a:fillRect/>
-          </a:stretch>
-        </p:blipFill>
-        <p:spPr bwMode="auto">
-          <a:xfrm>
-            <a:off x="7751041" y="493568"/>
-            <a:ext cx="4762500" cy="4762500"/>
-          </a:xfrm>
-          <a:prstGeom prst="rect">
-            <a:avLst/>
-          </a:prstGeom>
-          <a:noFill/>
-          <a:extLst>
-            <a:ext uri="{909E8E84-426E-40DD-AFC4-6F175D3DCCD1}">
-              <a14:hiddenFill xmlns:a14="http://schemas.microsoft.com/office/drawing/2010/main">
-                <a:solidFill>
-                  <a:srgbClr val="FFFFFF"/>
-                </a:solidFill>
-              </a14:hiddenFill>
-            </a:ext>
-          </a:extLst>
-        </p:spPr>
-      </p:pic>
-    </p:spTree>
   </p:cSld>
   <p:clrMapOvr>
     <a:masterClrMapping/>
@@ -19739,6 +20655,136 @@
 </file>
 
 <file path=ppt/slides/slide3.xml><?xml version="1.0" encoding="utf-8"?>
+<p:sld xmlns:a="http://schemas.openxmlformats.org/drawingml/2006/main" xmlns:r="http://schemas.openxmlformats.org/officeDocument/2006/relationships" xmlns:p="http://schemas.openxmlformats.org/presentationml/2006/main">
+  <p:cSld>
+    <p:bg>
+      <p:bgPr>
+        <a:solidFill>
+          <a:srgbClr val="000000"/>
+        </a:solidFill>
+        <a:effectLst/>
+      </p:bgPr>
+    </p:bg>
+    <p:spTree>
+      <p:nvGrpSpPr>
+        <p:cNvPr id="1" name=""/>
+        <p:cNvGrpSpPr/>
+        <p:nvPr/>
+      </p:nvGrpSpPr>
+      <p:grpSpPr>
+        <a:xfrm>
+          <a:off x="0" y="0"/>
+          <a:ext cx="0" cy="0"/>
+          <a:chOff x="0" y="0"/>
+          <a:chExt cx="0" cy="0"/>
+        </a:xfrm>
+      </p:grpSpPr>
+      <p:sp>
+        <p:nvSpPr>
+          <p:cNvPr id="5" name="Rectangle 4">
+            <a:extLst>
+              <a:ext uri="{FF2B5EF4-FFF2-40B4-BE49-F238E27FC236}">
+                <a16:creationId xmlns:a16="http://schemas.microsoft.com/office/drawing/2014/main" id="{D7C6F2B3-F2F7-5BBB-8840-CB5B5F526CC5}"/>
+              </a:ext>
+            </a:extLst>
+          </p:cNvPr>
+          <p:cNvSpPr/>
+          <p:nvPr/>
+        </p:nvSpPr>
+        <p:spPr>
+          <a:xfrm>
+            <a:off x="8419171" y="5999357"/>
+            <a:ext cx="3624146" cy="735980"/>
+          </a:xfrm>
+          <a:prstGeom prst="rect">
+            <a:avLst/>
+          </a:prstGeom>
+          <a:solidFill>
+            <a:srgbClr val="000000"/>
+          </a:solidFill>
+          <a:ln>
+            <a:noFill/>
+          </a:ln>
+        </p:spPr>
+        <p:style>
+          <a:lnRef idx="2">
+            <a:schemeClr val="accent1">
+              <a:shade val="15000"/>
+            </a:schemeClr>
+          </a:lnRef>
+          <a:fillRef idx="1">
+            <a:schemeClr val="accent1"/>
+          </a:fillRef>
+          <a:effectRef idx="0">
+            <a:schemeClr val="accent1"/>
+          </a:effectRef>
+          <a:fontRef idx="minor">
+            <a:schemeClr val="lt1"/>
+          </a:fontRef>
+        </p:style>
+        <p:txBody>
+          <a:bodyPr rtlCol="0" anchor="ctr"/>
+          <a:lstStyle/>
+          <a:p>
+            <a:pPr algn="ctr"/>
+            <a:endParaRPr lang="en-GB"/>
+          </a:p>
+        </p:txBody>
+      </p:sp>
+      <p:pic>
+        <p:nvPicPr>
+          <p:cNvPr id="3" name="Picture 2" descr="sql2">
+            <a:extLst>
+              <a:ext uri="{FF2B5EF4-FFF2-40B4-BE49-F238E27FC236}">
+                <a16:creationId xmlns:a16="http://schemas.microsoft.com/office/drawing/2014/main" id="{388562DA-D7AA-3403-F94E-47B6435DDAB6}"/>
+              </a:ext>
+            </a:extLst>
+          </p:cNvPr>
+          <p:cNvPicPr>
+            <a:picLocks noGrp="1" noChangeAspect="1"/>
+          </p:cNvPicPr>
+          <p:nvPr isPhoto="1"/>
+        </p:nvPicPr>
+        <p:blipFill>
+          <a:blip r:embed="rId2">
+            <a:lum/>
+            <a:extLst>
+              <a:ext uri="{28A0092B-C50C-407E-A947-70E740481C1C}">
+                <a14:useLocalDpi xmlns:a14="http://schemas.microsoft.com/office/drawing/2010/main" val="0"/>
+              </a:ext>
+            </a:extLst>
+          </a:blip>
+          <a:stretch>
+            <a:fillRect/>
+          </a:stretch>
+        </p:blipFill>
+        <p:spPr>
+          <a:xfrm>
+            <a:off x="1873607" y="122664"/>
+            <a:ext cx="8816898" cy="6612673"/>
+          </a:xfrm>
+          <a:prstGeom prst="rect">
+            <a:avLst/>
+          </a:prstGeom>
+          <a:effectLst>
+            <a:softEdge rad="317500"/>
+          </a:effectLst>
+        </p:spPr>
+      </p:pic>
+    </p:spTree>
+    <p:extLst>
+      <p:ext uri="{BB962C8B-B14F-4D97-AF65-F5344CB8AC3E}">
+        <p14:creationId xmlns:p14="http://schemas.microsoft.com/office/powerpoint/2010/main" val="1005618997"/>
+      </p:ext>
+    </p:extLst>
+  </p:cSld>
+  <p:clrMapOvr>
+    <a:masterClrMapping/>
+  </p:clrMapOvr>
+</p:sld>
+</file>
+
+<file path=ppt/slides/slide4.xml><?xml version="1.0" encoding="utf-8"?>
 <p:sld xmlns:a="http://schemas.openxmlformats.org/drawingml/2006/main" xmlns:r="http://schemas.openxmlformats.org/officeDocument/2006/relationships" xmlns:p="http://schemas.openxmlformats.org/presentationml/2006/main">
   <p:cSld>
     <p:spTree>
@@ -19908,136 +20954,6 @@
 </p:sld>
 </file>
 
-<file path=ppt/slides/slide4.xml><?xml version="1.0" encoding="utf-8"?>
-<p:sld xmlns:a="http://schemas.openxmlformats.org/drawingml/2006/main" xmlns:r="http://schemas.openxmlformats.org/officeDocument/2006/relationships" xmlns:p="http://schemas.openxmlformats.org/presentationml/2006/main">
-  <p:cSld>
-    <p:spTree>
-      <p:nvGrpSpPr>
-        <p:cNvPr id="1" name="">
-          <a:extLst>
-            <a:ext uri="{FF2B5EF4-FFF2-40B4-BE49-F238E27FC236}">
-              <a16:creationId xmlns:a16="http://schemas.microsoft.com/office/drawing/2014/main" id="{85C269F8-5D4B-BB70-EE54-EB57E00A27B5}"/>
-            </a:ext>
-          </a:extLst>
-        </p:cNvPr>
-        <p:cNvGrpSpPr/>
-        <p:nvPr/>
-      </p:nvGrpSpPr>
-      <p:grpSpPr>
-        <a:xfrm>
-          <a:off x="0" y="0"/>
-          <a:ext cx="0" cy="0"/>
-          <a:chOff x="0" y="0"/>
-          <a:chExt cx="0" cy="0"/>
-        </a:xfrm>
-      </p:grpSpPr>
-      <p:sp>
-        <p:nvSpPr>
-          <p:cNvPr id="3" name="Subtitle 2">
-            <a:extLst>
-              <a:ext uri="{FF2B5EF4-FFF2-40B4-BE49-F238E27FC236}">
-                <a16:creationId xmlns:a16="http://schemas.microsoft.com/office/drawing/2014/main" id="{8B519094-9940-A632-004E-0F2B89594C5B}"/>
-              </a:ext>
-            </a:extLst>
-          </p:cNvPr>
-          <p:cNvSpPr>
-            <a:spLocks noGrp="1"/>
-          </p:cNvSpPr>
-          <p:nvPr>
-            <p:ph type="subTitle" idx="1"/>
-          </p:nvPr>
-        </p:nvSpPr>
-        <p:spPr>
-          <a:xfrm>
-            <a:off x="531091" y="-191386"/>
-            <a:ext cx="11129818" cy="5975927"/>
-          </a:xfrm>
-        </p:spPr>
-        <p:txBody>
-          <a:bodyPr>
-            <a:normAutofit/>
-          </a:bodyPr>
-          <a:lstStyle/>
-          <a:p>
-            <a:r>
-              <a:rPr lang="en-IN" sz="3600" b="1" dirty="0">
-                <a:solidFill>
-                  <a:srgbClr val="FF0000"/>
-                </a:solidFill>
-                <a:latin typeface="Times New Roman" panose="02020603050405020304" pitchFamily="18" charset="0"/>
-                <a:cs typeface="Times New Roman" panose="02020603050405020304" pitchFamily="18" charset="0"/>
-              </a:rPr>
-              <a:t>ER Diagram</a:t>
-            </a:r>
-          </a:p>
-          <a:p>
-            <a:endParaRPr lang="en-IN" sz="4800" b="1" dirty="0">
-              <a:solidFill>
-                <a:srgbClr val="FF0000"/>
-              </a:solidFill>
-              <a:latin typeface="Times New Roman" panose="02020603050405020304" pitchFamily="18" charset="0"/>
-              <a:cs typeface="Times New Roman" panose="02020603050405020304" pitchFamily="18" charset="0"/>
-            </a:endParaRPr>
-          </a:p>
-          <a:p>
-            <a:endParaRPr lang="en-GB" sz="4800" b="1" dirty="0">
-              <a:solidFill>
-                <a:srgbClr val="FF0000"/>
-              </a:solidFill>
-              <a:latin typeface="Times New Roman" panose="02020603050405020304" pitchFamily="18" charset="0"/>
-              <a:cs typeface="Times New Roman" panose="02020603050405020304" pitchFamily="18" charset="0"/>
-            </a:endParaRPr>
-          </a:p>
-        </p:txBody>
-      </p:sp>
-      <p:pic>
-        <p:nvPicPr>
-          <p:cNvPr id="4" name="Picture 3">
-            <a:extLst>
-              <a:ext uri="{FF2B5EF4-FFF2-40B4-BE49-F238E27FC236}">
-                <a16:creationId xmlns:a16="http://schemas.microsoft.com/office/drawing/2014/main" id="{74DDF8E2-5379-BAB6-A89D-12BAD7F82132}"/>
-              </a:ext>
-            </a:extLst>
-          </p:cNvPr>
-          <p:cNvPicPr>
-            <a:picLocks noChangeAspect="1"/>
-          </p:cNvPicPr>
-          <p:nvPr/>
-        </p:nvPicPr>
-        <p:blipFill>
-          <a:blip r:embed="rId2"/>
-          <a:stretch>
-            <a:fillRect/>
-          </a:stretch>
-        </p:blipFill>
-        <p:spPr>
-          <a:xfrm>
-            <a:off x="1594883" y="566907"/>
-            <a:ext cx="9356651" cy="5655135"/>
-          </a:xfrm>
-          <a:prstGeom prst="rect">
-            <a:avLst/>
-          </a:prstGeom>
-          <a:ln>
-            <a:solidFill>
-              <a:schemeClr val="accent1"/>
-            </a:solidFill>
-          </a:ln>
-        </p:spPr>
-      </p:pic>
-    </p:spTree>
-    <p:extLst>
-      <p:ext uri="{BB962C8B-B14F-4D97-AF65-F5344CB8AC3E}">
-        <p14:creationId xmlns:p14="http://schemas.microsoft.com/office/powerpoint/2010/main" val="4215322337"/>
-      </p:ext>
-    </p:extLst>
-  </p:cSld>
-  <p:clrMapOvr>
-    <a:masterClrMapping/>
-  </p:clrMapOvr>
-</p:sld>
-</file>
-
 <file path=ppt/slides/slide5.xml><?xml version="1.0" encoding="utf-8"?>
 <p:sld xmlns:a="http://schemas.openxmlformats.org/drawingml/2006/main" xmlns:r="http://schemas.openxmlformats.org/officeDocument/2006/relationships" xmlns:p="http://schemas.openxmlformats.org/presentationml/2006/main">
   <p:cSld>
@@ -20204,6 +21120,136 @@
   <p:cSld>
     <p:spTree>
       <p:nvGrpSpPr>
+        <p:cNvPr id="1" name="">
+          <a:extLst>
+            <a:ext uri="{FF2B5EF4-FFF2-40B4-BE49-F238E27FC236}">
+              <a16:creationId xmlns:a16="http://schemas.microsoft.com/office/drawing/2014/main" id="{85C269F8-5D4B-BB70-EE54-EB57E00A27B5}"/>
+            </a:ext>
+          </a:extLst>
+        </p:cNvPr>
+        <p:cNvGrpSpPr/>
+        <p:nvPr/>
+      </p:nvGrpSpPr>
+      <p:grpSpPr>
+        <a:xfrm>
+          <a:off x="0" y="0"/>
+          <a:ext cx="0" cy="0"/>
+          <a:chOff x="0" y="0"/>
+          <a:chExt cx="0" cy="0"/>
+        </a:xfrm>
+      </p:grpSpPr>
+      <p:sp>
+        <p:nvSpPr>
+          <p:cNvPr id="3" name="Subtitle 2">
+            <a:extLst>
+              <a:ext uri="{FF2B5EF4-FFF2-40B4-BE49-F238E27FC236}">
+                <a16:creationId xmlns:a16="http://schemas.microsoft.com/office/drawing/2014/main" id="{8B519094-9940-A632-004E-0F2B89594C5B}"/>
+              </a:ext>
+            </a:extLst>
+          </p:cNvPr>
+          <p:cNvSpPr>
+            <a:spLocks noGrp="1"/>
+          </p:cNvSpPr>
+          <p:nvPr>
+            <p:ph type="subTitle" idx="1"/>
+          </p:nvPr>
+        </p:nvSpPr>
+        <p:spPr>
+          <a:xfrm>
+            <a:off x="531091" y="-191386"/>
+            <a:ext cx="11129818" cy="5975927"/>
+          </a:xfrm>
+        </p:spPr>
+        <p:txBody>
+          <a:bodyPr>
+            <a:normAutofit/>
+          </a:bodyPr>
+          <a:lstStyle/>
+          <a:p>
+            <a:r>
+              <a:rPr lang="en-IN" sz="3600" b="1" dirty="0">
+                <a:solidFill>
+                  <a:srgbClr val="FF0000"/>
+                </a:solidFill>
+                <a:latin typeface="Times New Roman" panose="02020603050405020304" pitchFamily="18" charset="0"/>
+                <a:cs typeface="Times New Roman" panose="02020603050405020304" pitchFamily="18" charset="0"/>
+              </a:rPr>
+              <a:t>ER Diagram</a:t>
+            </a:r>
+          </a:p>
+          <a:p>
+            <a:endParaRPr lang="en-IN" sz="4800" b="1" dirty="0">
+              <a:solidFill>
+                <a:srgbClr val="FF0000"/>
+              </a:solidFill>
+              <a:latin typeface="Times New Roman" panose="02020603050405020304" pitchFamily="18" charset="0"/>
+              <a:cs typeface="Times New Roman" panose="02020603050405020304" pitchFamily="18" charset="0"/>
+            </a:endParaRPr>
+          </a:p>
+          <a:p>
+            <a:endParaRPr lang="en-GB" sz="4800" b="1" dirty="0">
+              <a:solidFill>
+                <a:srgbClr val="FF0000"/>
+              </a:solidFill>
+              <a:latin typeface="Times New Roman" panose="02020603050405020304" pitchFamily="18" charset="0"/>
+              <a:cs typeface="Times New Roman" panose="02020603050405020304" pitchFamily="18" charset="0"/>
+            </a:endParaRPr>
+          </a:p>
+        </p:txBody>
+      </p:sp>
+      <p:pic>
+        <p:nvPicPr>
+          <p:cNvPr id="4" name="Picture 3">
+            <a:extLst>
+              <a:ext uri="{FF2B5EF4-FFF2-40B4-BE49-F238E27FC236}">
+                <a16:creationId xmlns:a16="http://schemas.microsoft.com/office/drawing/2014/main" id="{74DDF8E2-5379-BAB6-A89D-12BAD7F82132}"/>
+              </a:ext>
+            </a:extLst>
+          </p:cNvPr>
+          <p:cNvPicPr>
+            <a:picLocks noChangeAspect="1"/>
+          </p:cNvPicPr>
+          <p:nvPr/>
+        </p:nvPicPr>
+        <p:blipFill>
+          <a:blip r:embed="rId2"/>
+          <a:stretch>
+            <a:fillRect/>
+          </a:stretch>
+        </p:blipFill>
+        <p:spPr>
+          <a:xfrm>
+            <a:off x="1816556" y="527541"/>
+            <a:ext cx="9356651" cy="5655135"/>
+          </a:xfrm>
+          <a:prstGeom prst="rect">
+            <a:avLst/>
+          </a:prstGeom>
+          <a:ln>
+            <a:solidFill>
+              <a:schemeClr val="accent1"/>
+            </a:solidFill>
+          </a:ln>
+        </p:spPr>
+      </p:pic>
+    </p:spTree>
+    <p:extLst>
+      <p:ext uri="{BB962C8B-B14F-4D97-AF65-F5344CB8AC3E}">
+        <p14:creationId xmlns:p14="http://schemas.microsoft.com/office/powerpoint/2010/main" val="4215322337"/>
+      </p:ext>
+    </p:extLst>
+  </p:cSld>
+  <p:clrMapOvr>
+    <a:masterClrMapping/>
+  </p:clrMapOvr>
+</p:sld>
+</file>
+
+<file path=ppt/slides/slide7.xml><?xml version="1.0" encoding="utf-8"?>
+<p:sld xmlns:a="http://schemas.openxmlformats.org/drawingml/2006/main" xmlns:r="http://schemas.openxmlformats.org/officeDocument/2006/relationships" xmlns:p="http://schemas.openxmlformats.org/presentationml/2006/main">
+  <p:cSld>
+    <p:spTree>
+      <p:nvGrpSpPr>
         <p:cNvPr id="1" name=""/>
         <p:cNvGrpSpPr/>
         <p:nvPr/>
@@ -20473,7 +21519,7 @@
 </p:sld>
 </file>
 
-<file path=ppt/slides/slide7.xml><?xml version="1.0" encoding="utf-8"?>
+<file path=ppt/slides/slide8.xml><?xml version="1.0" encoding="utf-8"?>
 <p:sld xmlns:a="http://schemas.openxmlformats.org/drawingml/2006/main" xmlns:r="http://schemas.openxmlformats.org/officeDocument/2006/relationships" xmlns:p="http://schemas.openxmlformats.org/presentationml/2006/main">
   <p:cSld>
     <p:spTree>
@@ -20508,7 +21554,7 @@
         </p:nvSpPr>
         <p:spPr>
           <a:xfrm>
-            <a:off x="240145" y="0"/>
+            <a:off x="147781" y="1"/>
             <a:ext cx="11720945" cy="6857999"/>
           </a:xfrm>
         </p:spPr>
@@ -20603,7 +21649,7 @@
         </p:blipFill>
         <p:spPr>
           <a:xfrm>
-            <a:off x="595188" y="2739073"/>
+            <a:off x="502824" y="2739074"/>
             <a:ext cx="5080118" cy="1712853"/>
           </a:xfrm>
           <a:prstGeom prst="rect">
@@ -20630,7 +21676,7 @@
         </p:nvSpPr>
         <p:spPr>
           <a:xfrm>
-            <a:off x="92364" y="1477818"/>
+            <a:off x="0" y="1477819"/>
             <a:ext cx="11933381" cy="5301673"/>
           </a:xfrm>
           <a:prstGeom prst="rect">
@@ -20680,7 +21726,7 @@
         </p:nvSpPr>
         <p:spPr>
           <a:xfrm>
-            <a:off x="6241097" y="3429000"/>
+            <a:off x="6148733" y="3429001"/>
             <a:ext cx="1754909" cy="212436"/>
           </a:xfrm>
           <a:prstGeom prst="rightArrow">
@@ -20733,7 +21779,7 @@
         </p:blipFill>
         <p:spPr>
           <a:xfrm>
-            <a:off x="8577360" y="1579456"/>
+            <a:off x="8484996" y="1579457"/>
             <a:ext cx="2530764" cy="4512998"/>
           </a:xfrm>
           <a:prstGeom prst="rect">
@@ -20746,6 +21792,72 @@
           </a:ln>
         </p:spPr>
       </p:pic>
+      <p:sp>
+        <p:nvSpPr>
+          <p:cNvPr id="2" name="TextBox 1">
+            <a:extLst>
+              <a:ext uri="{FF2B5EF4-FFF2-40B4-BE49-F238E27FC236}">
+                <a16:creationId xmlns:a16="http://schemas.microsoft.com/office/drawing/2014/main" id="{1005C389-EBAD-FB77-6E9B-483BC8A22DB8}"/>
+              </a:ext>
+            </a:extLst>
+          </p:cNvPr>
+          <p:cNvSpPr txBox="1"/>
+          <p:nvPr/>
+        </p:nvSpPr>
+        <p:spPr>
+          <a:xfrm>
+            <a:off x="422187" y="4532723"/>
+            <a:ext cx="6604000" cy="2246769"/>
+          </a:xfrm>
+          <a:prstGeom prst="rect">
+            <a:avLst/>
+          </a:prstGeom>
+          <a:noFill/>
+        </p:spPr>
+        <p:txBody>
+          <a:bodyPr wrap="square" rtlCol="0">
+            <a:spAutoFit/>
+          </a:bodyPr>
+          <a:lstStyle/>
+          <a:p>
+            <a:r>
+              <a:rPr lang="en-IN" sz="2000" b="1" dirty="0">
+                <a:latin typeface="Times New Roman" panose="02020603050405020304" pitchFamily="18" charset="0"/>
+                <a:cs typeface="Times New Roman" panose="02020603050405020304" pitchFamily="18" charset="0"/>
+              </a:rPr>
+              <a:t>Insight:</a:t>
+            </a:r>
+          </a:p>
+          <a:p>
+            <a:r>
+              <a:rPr lang="en-GB" sz="2000" dirty="0">
+                <a:latin typeface="Times New Roman" panose="02020603050405020304" pitchFamily="18" charset="0"/>
+                <a:cs typeface="Times New Roman" panose="02020603050405020304" pitchFamily="18" charset="0"/>
+              </a:rPr>
+              <a:t>The results show the total emissions recorded for each country in the latest available year, allowing comparison of emission levels across countries and providing a basis for further environmental and economic analysis.</a:t>
+            </a:r>
+            <a:endParaRPr lang="en-IN" sz="2000" dirty="0">
+              <a:latin typeface="Times New Roman" panose="02020603050405020304" pitchFamily="18" charset="0"/>
+              <a:cs typeface="Times New Roman" panose="02020603050405020304" pitchFamily="18" charset="0"/>
+            </a:endParaRPr>
+          </a:p>
+          <a:p>
+            <a:r>
+              <a:rPr lang="en-IN" sz="2000" dirty="0">
+                <a:latin typeface="Times New Roman" panose="02020603050405020304" pitchFamily="18" charset="0"/>
+                <a:cs typeface="Times New Roman" panose="02020603050405020304" pitchFamily="18" charset="0"/>
+              </a:rPr>
+              <a:t>.</a:t>
+            </a:r>
+          </a:p>
+          <a:p>
+            <a:endParaRPr lang="en-GB" sz="2000" dirty="0">
+              <a:latin typeface="Times New Roman" panose="02020603050405020304" pitchFamily="18" charset="0"/>
+              <a:cs typeface="Times New Roman" panose="02020603050405020304" pitchFamily="18" charset="0"/>
+            </a:endParaRPr>
+          </a:p>
+        </p:txBody>
+      </p:sp>
     </p:spTree>
     <p:extLst>
       <p:ext uri="{BB962C8B-B14F-4D97-AF65-F5344CB8AC3E}">
@@ -20759,7 +21871,7 @@
 </p:sld>
 </file>
 
-<file path=ppt/slides/slide8.xml><?xml version="1.0" encoding="utf-8"?>
+<file path=ppt/slides/slide9.xml><?xml version="1.0" encoding="utf-8"?>
 <p:sld xmlns:a="http://schemas.openxmlformats.org/drawingml/2006/main" xmlns:r="http://schemas.openxmlformats.org/officeDocument/2006/relationships" xmlns:p="http://schemas.openxmlformats.org/presentationml/2006/main">
   <p:cSld>
     <p:spTree>
@@ -21007,264 +22119,78 @@
           </a:ln>
         </p:spPr>
       </p:pic>
-    </p:spTree>
-    <p:extLst>
-      <p:ext uri="{BB962C8B-B14F-4D97-AF65-F5344CB8AC3E}">
-        <p14:creationId xmlns:p14="http://schemas.microsoft.com/office/powerpoint/2010/main" val="1627825306"/>
-      </p:ext>
-    </p:extLst>
-  </p:cSld>
-  <p:clrMapOvr>
-    <a:masterClrMapping/>
-  </p:clrMapOvr>
-</p:sld>
-</file>
-
-<file path=ppt/slides/slide9.xml><?xml version="1.0" encoding="utf-8"?>
-<p:sld xmlns:a="http://schemas.openxmlformats.org/drawingml/2006/main" xmlns:r="http://schemas.openxmlformats.org/officeDocument/2006/relationships" xmlns:p="http://schemas.openxmlformats.org/presentationml/2006/main">
-  <p:cSld>
-    <p:spTree>
-      <p:nvGrpSpPr>
-        <p:cNvPr id="1" name="">
-          <a:extLst>
-            <a:ext uri="{FF2B5EF4-FFF2-40B4-BE49-F238E27FC236}">
-              <a16:creationId xmlns:a16="http://schemas.microsoft.com/office/drawing/2014/main" id="{80CD98F4-7242-0D8E-D468-0F025BAB5BBD}"/>
-            </a:ext>
-          </a:extLst>
-        </p:cNvPr>
-        <p:cNvGrpSpPr/>
-        <p:nvPr/>
-      </p:nvGrpSpPr>
-      <p:grpSpPr>
-        <a:xfrm>
-          <a:off x="0" y="0"/>
-          <a:ext cx="0" cy="0"/>
-          <a:chOff x="0" y="0"/>
-          <a:chExt cx="0" cy="0"/>
-        </a:xfrm>
-      </p:grpSpPr>
       <p:sp>
         <p:nvSpPr>
-          <p:cNvPr id="3" name="Subtitle 2">
+          <p:cNvPr id="4" name="TextBox 3">
             <a:extLst>
               <a:ext uri="{FF2B5EF4-FFF2-40B4-BE49-F238E27FC236}">
-                <a16:creationId xmlns:a16="http://schemas.microsoft.com/office/drawing/2014/main" id="{1882ECF1-A576-7602-94FA-6DDB45CC3825}"/>
+                <a16:creationId xmlns:a16="http://schemas.microsoft.com/office/drawing/2014/main" id="{08683E6F-D2BD-1F9C-7E5A-ABA72AC0E056}"/>
               </a:ext>
             </a:extLst>
           </p:cNvPr>
-          <p:cNvSpPr>
-            <a:spLocks noGrp="1"/>
-          </p:cNvSpPr>
-          <p:nvPr>
-            <p:ph type="subTitle" idx="1"/>
-          </p:nvPr>
+          <p:cNvSpPr txBox="1"/>
+          <p:nvPr/>
         </p:nvSpPr>
         <p:spPr>
           <a:xfrm>
-            <a:off x="240145" y="0"/>
-            <a:ext cx="11720945" cy="6857999"/>
+            <a:off x="628072" y="4279591"/>
+            <a:ext cx="10926619" cy="1015663"/>
           </a:xfrm>
+          <a:prstGeom prst="rect">
+            <a:avLst/>
+          </a:prstGeom>
+          <a:noFill/>
         </p:spPr>
         <p:txBody>
-          <a:bodyPr/>
+          <a:bodyPr wrap="square">
+            <a:spAutoFit/>
+          </a:bodyPr>
           <a:lstStyle/>
           <a:p>
-            <a:pPr algn="l"/>
             <a:r>
-              <a:rPr lang="en-IN" b="1" dirty="0">
-                <a:solidFill>
-                  <a:srgbClr val="FF0000"/>
-                </a:solidFill>
+              <a:rPr lang="en-IN" sz="2000" b="1" dirty="0">
                 <a:latin typeface="Times New Roman" panose="02020603050405020304" pitchFamily="18" charset="0"/>
                 <a:cs typeface="Times New Roman" panose="02020603050405020304" pitchFamily="18" charset="0"/>
               </a:rPr>
-              <a:t>Q3:</a:t>
+              <a:t>Insight:</a:t>
             </a:r>
+          </a:p>
+          <a:p>
+            <a:pPr marL="285750" indent="-285750">
+              <a:buFont typeface="Wingdings" panose="05000000000000000000" pitchFamily="2" charset="2"/>
+              <a:buChar char="§"/>
+            </a:pPr>
             <a:r>
-              <a:rPr lang="en-US" b="1" dirty="0"/>
-              <a:t>Compare energy production and consumption by country and year.</a:t>
+              <a:rPr lang="en-GB" sz="2000" dirty="0">
+                <a:latin typeface="Times New Roman" panose="02020603050405020304" pitchFamily="18" charset="0"/>
+                <a:cs typeface="Times New Roman" panose="02020603050405020304" pitchFamily="18" charset="0"/>
+              </a:rPr>
+              <a:t>China and the United States are among the highest GDP, followed by other major global economies.</a:t>
             </a:r>
-            <a:br>
-              <a:rPr lang="en-US" dirty="0"/>
-            </a:br>
-            <a:endParaRPr lang="en-GB" b="1" dirty="0">
-              <a:solidFill>
-                <a:srgbClr val="FF0000"/>
-              </a:solidFill>
+          </a:p>
+          <a:p>
+            <a:pPr marL="285750" indent="-285750">
+              <a:buFont typeface="Wingdings" panose="05000000000000000000" pitchFamily="2" charset="2"/>
+              <a:buChar char="§"/>
+            </a:pPr>
+            <a:r>
+              <a:rPr lang="en-GB" sz="2000" dirty="0">
+                <a:latin typeface="Times New Roman" panose="02020603050405020304" pitchFamily="18" charset="0"/>
+                <a:cs typeface="Times New Roman" panose="02020603050405020304" pitchFamily="18" charset="0"/>
+              </a:rPr>
+              <a:t>Economic growth often correlates with increased energy demand and infrastructure development.</a:t>
+            </a:r>
+            <a:endParaRPr lang="en-IN" sz="2000" dirty="0">
               <a:latin typeface="Times New Roman" panose="02020603050405020304" pitchFamily="18" charset="0"/>
               <a:cs typeface="Times New Roman" panose="02020603050405020304" pitchFamily="18" charset="0"/>
             </a:endParaRPr>
           </a:p>
         </p:txBody>
       </p:sp>
-      <p:sp>
-        <p:nvSpPr>
-          <p:cNvPr id="9" name="Rectangle 8">
-            <a:extLst>
-              <a:ext uri="{FF2B5EF4-FFF2-40B4-BE49-F238E27FC236}">
-                <a16:creationId xmlns:a16="http://schemas.microsoft.com/office/drawing/2014/main" id="{87F054AC-7C1C-7612-2D25-DD0D381097AA}"/>
-              </a:ext>
-            </a:extLst>
-          </p:cNvPr>
-          <p:cNvSpPr/>
-          <p:nvPr/>
-        </p:nvSpPr>
-        <p:spPr>
-          <a:xfrm>
-            <a:off x="129309" y="723016"/>
-            <a:ext cx="11933381" cy="5456111"/>
-          </a:xfrm>
-          <a:prstGeom prst="rect">
-            <a:avLst/>
-          </a:prstGeom>
-          <a:noFill/>
-          <a:ln>
-            <a:solidFill>
-              <a:schemeClr val="tx1"/>
-            </a:solidFill>
-          </a:ln>
-        </p:spPr>
-        <p:style>
-          <a:lnRef idx="2">
-            <a:schemeClr val="accent6"/>
-          </a:lnRef>
-          <a:fillRef idx="1">
-            <a:schemeClr val="lt1"/>
-          </a:fillRef>
-          <a:effectRef idx="0">
-            <a:schemeClr val="accent6"/>
-          </a:effectRef>
-          <a:fontRef idx="minor">
-            <a:schemeClr val="dk1"/>
-          </a:fontRef>
-        </p:style>
-        <p:txBody>
-          <a:bodyPr rtlCol="0" anchor="ctr"/>
-          <a:lstStyle/>
-          <a:p>
-            <a:pPr algn="ctr"/>
-            <a:endParaRPr lang="en-GB"/>
-          </a:p>
-        </p:txBody>
-      </p:sp>
-      <p:sp>
-        <p:nvSpPr>
-          <p:cNvPr id="10" name="Arrow: Right 9">
-            <a:extLst>
-              <a:ext uri="{FF2B5EF4-FFF2-40B4-BE49-F238E27FC236}">
-                <a16:creationId xmlns:a16="http://schemas.microsoft.com/office/drawing/2014/main" id="{661594D6-EC89-A89E-8323-D946883EFAFB}"/>
-              </a:ext>
-            </a:extLst>
-          </p:cNvPr>
-          <p:cNvSpPr/>
-          <p:nvPr/>
-        </p:nvSpPr>
-        <p:spPr>
-          <a:xfrm>
-            <a:off x="5720816" y="3108033"/>
-            <a:ext cx="463887" cy="374073"/>
-          </a:xfrm>
-          <a:prstGeom prst="rightArrow">
-            <a:avLst/>
-          </a:prstGeom>
-        </p:spPr>
-        <p:style>
-          <a:lnRef idx="2">
-            <a:schemeClr val="dk1"/>
-          </a:lnRef>
-          <a:fillRef idx="1">
-            <a:schemeClr val="lt1"/>
-          </a:fillRef>
-          <a:effectRef idx="0">
-            <a:schemeClr val="dk1"/>
-          </a:effectRef>
-          <a:fontRef idx="minor">
-            <a:schemeClr val="dk1"/>
-          </a:fontRef>
-        </p:style>
-        <p:txBody>
-          <a:bodyPr rtlCol="0" anchor="ctr"/>
-          <a:lstStyle/>
-          <a:p>
-            <a:pPr algn="ctr"/>
-            <a:endParaRPr lang="en-GB" dirty="0"/>
-          </a:p>
-        </p:txBody>
-      </p:sp>
-      <p:pic>
-        <p:nvPicPr>
-          <p:cNvPr id="5" name="Picture 4">
-            <a:extLst>
-              <a:ext uri="{FF2B5EF4-FFF2-40B4-BE49-F238E27FC236}">
-                <a16:creationId xmlns:a16="http://schemas.microsoft.com/office/drawing/2014/main" id="{D3528CC2-75DC-D693-9D39-D9EE51B9CEC8}"/>
-              </a:ext>
-            </a:extLst>
-          </p:cNvPr>
-          <p:cNvPicPr>
-            <a:picLocks noChangeAspect="1"/>
-          </p:cNvPicPr>
-          <p:nvPr/>
-        </p:nvPicPr>
-        <p:blipFill>
-          <a:blip r:embed="rId2"/>
-          <a:stretch>
-            <a:fillRect/>
-          </a:stretch>
-        </p:blipFill>
-        <p:spPr>
-          <a:xfrm>
-            <a:off x="6421705" y="1603356"/>
-            <a:ext cx="5530150" cy="3058475"/>
-          </a:xfrm>
-          <a:prstGeom prst="rect">
-            <a:avLst/>
-          </a:prstGeom>
-          <a:ln>
-            <a:solidFill>
-              <a:schemeClr val="accent1"/>
-            </a:solidFill>
-          </a:ln>
-        </p:spPr>
-      </p:pic>
-      <p:pic>
-        <p:nvPicPr>
-          <p:cNvPr id="4" name="Picture 3">
-            <a:extLst>
-              <a:ext uri="{FF2B5EF4-FFF2-40B4-BE49-F238E27FC236}">
-                <a16:creationId xmlns:a16="http://schemas.microsoft.com/office/drawing/2014/main" id="{35F876B1-E0F7-C172-A878-8E273BB370FC}"/>
-              </a:ext>
-            </a:extLst>
-          </p:cNvPr>
-          <p:cNvPicPr>
-            <a:picLocks noChangeAspect="1"/>
-          </p:cNvPicPr>
-          <p:nvPr/>
-        </p:nvPicPr>
-        <p:blipFill>
-          <a:blip r:embed="rId3"/>
-          <a:stretch>
-            <a:fillRect/>
-          </a:stretch>
-        </p:blipFill>
-        <p:spPr>
-          <a:xfrm>
-            <a:off x="370346" y="1603356"/>
-            <a:ext cx="5113468" cy="3138128"/>
-          </a:xfrm>
-          <a:prstGeom prst="rect">
-            <a:avLst/>
-          </a:prstGeom>
-          <a:ln>
-            <a:solidFill>
-              <a:schemeClr val="accent1"/>
-            </a:solidFill>
-          </a:ln>
-        </p:spPr>
-      </p:pic>
     </p:spTree>
     <p:extLst>
       <p:ext uri="{BB962C8B-B14F-4D97-AF65-F5344CB8AC3E}">
-        <p14:creationId xmlns:p14="http://schemas.microsoft.com/office/powerpoint/2010/main" val="1214091314"/>
+        <p14:creationId xmlns:p14="http://schemas.microsoft.com/office/powerpoint/2010/main" val="1627825306"/>
       </p:ext>
     </p:extLst>
   </p:cSld>
